--- a/presentation/MineGuard_Edge_Hackathon.pptx
+++ b/presentation/MineGuard_Edge_Hackathon.pptx
@@ -18,7 +18,6 @@
     <p:sldId id="266" r:id="rId17"/>
     <p:sldId id="267" r:id="rId18"/>
     <p:sldId id="268" r:id="rId19"/>
-    <p:sldId id="269" r:id="rId20"/>
   </p:sldIdLst>
   <p:sldSz cx="12191695" cy="6858000" type="screen4x3"/>
   <p:notesSz cx="6858000" cy="9144000"/>
@@ -3117,7 +3116,7 @@
         </p:nvSpPr>
         <p:spPr>
           <a:xfrm>
-            <a:off x="822960" y="1828800"/>
+            <a:off x="822960" y="1463040"/>
             <a:ext cx="10515600" cy="1097280"/>
           </a:xfrm>
           <a:prstGeom prst="rect">
@@ -3152,7 +3151,7 @@
         </p:nvSpPr>
         <p:spPr>
           <a:xfrm>
-            <a:off x="822960" y="2926080"/>
+            <a:off x="822960" y="2468880"/>
             <a:ext cx="10515600" cy="731520"/>
           </a:xfrm>
           <a:prstGeom prst="rect">
@@ -3174,7 +3173,7 @@
               </a:defRPr>
             </a:pPr>
             <a:r>
-              <a:t>Offline AI Safety Intelligence for Underground Mines</a:t>
+              <a:t>Offline Gas Safety Intelligence for Underground Mines</a:t>
             </a:r>
           </a:p>
         </p:txBody>
@@ -3187,8 +3186,8 @@
         </p:nvSpPr>
         <p:spPr>
           <a:xfrm>
-            <a:off x="822960" y="3840480"/>
-            <a:ext cx="10515600" cy="548640"/>
+            <a:off x="822960" y="3291840"/>
+            <a:ext cx="10515600" cy="457200"/>
           </a:xfrm>
           <a:prstGeom prst="rect">
             <a:avLst/>
@@ -3204,12 +3203,47 @@
             <a:pPr algn="ctr">
               <a:defRPr sz="1400" b="0">
                 <a:solidFill>
+                  <a:srgbClr val="22C55E"/>
+                </a:solidFill>
+              </a:defRPr>
+            </a:pPr>
+            <a:r>
+              <a:t>Hackathon Track:  MINING  ·  also touches Health (worker safety) &amp; Sustainability (ventilation efficiency)</a:t>
+            </a:r>
+          </a:p>
+        </p:txBody>
+      </p:sp>
+      <p:sp>
+        <p:nvSpPr>
+          <p:cNvPr id="5" name="TextBox 4"/>
+          <p:cNvSpPr txBox="1"/>
+          <p:nvPr/>
+        </p:nvSpPr>
+        <p:spPr>
+          <a:xfrm>
+            <a:off x="822960" y="4114800"/>
+            <a:ext cx="10515600" cy="548640"/>
+          </a:xfrm>
+          <a:prstGeom prst="rect">
+            <a:avLst/>
+          </a:prstGeom>
+          <a:noFill/>
+        </p:spPr>
+        <p:txBody>
+          <a:bodyPr wrap="square">
+            <a:spAutoFit/>
+          </a:bodyPr>
+          <a:lstStyle/>
+          <a:p>
+            <a:pPr algn="ctr">
+              <a:defRPr sz="1300" b="0">
+                <a:solidFill>
                   <a:srgbClr val="94A3B8"/>
                 </a:solidFill>
               </a:defRPr>
             </a:pPr>
             <a:r>
-              <a:t>Cursor Hackathon  ·  Team of 3  ·  100% Local / No Cloud</a:t>
+              <a:t>Team of 3  ·  100% Local / No Cloud  ·  github.com/RavalDH/Cursor_Hack</a:t>
             </a:r>
           </a:p>
         </p:txBody>
@@ -3291,7 +3325,42 @@
         </p:nvSpPr>
         <p:spPr>
           <a:xfrm>
-            <a:off x="777240" y="411480"/>
+            <a:off x="777240" y="320040"/>
+            <a:ext cx="10515600" cy="320040"/>
+          </a:xfrm>
+          <a:prstGeom prst="rect">
+            <a:avLst/>
+          </a:prstGeom>
+          <a:noFill/>
+        </p:spPr>
+        <p:txBody>
+          <a:bodyPr wrap="square">
+            <a:spAutoFit/>
+          </a:bodyPr>
+          <a:lstStyle/>
+          <a:p>
+            <a:pPr algn="l">
+              <a:defRPr sz="1100" b="1">
+                <a:solidFill>
+                  <a:srgbClr val="38BDF8"/>
+                </a:solidFill>
+              </a:defRPr>
+            </a:pPr>
+            <a:r>
+              <a:t>JUDGING CRITERION 7 — Originality &amp; effort</a:t>
+            </a:r>
+          </a:p>
+        </p:txBody>
+      </p:sp>
+      <p:sp>
+        <p:nvSpPr>
+          <p:cNvPr id="4" name="TextBox 3"/>
+          <p:cNvSpPr txBox="1"/>
+          <p:nvPr/>
+        </p:nvSpPr>
+        <p:spPr>
+          <a:xfrm>
+            <a:off x="777240" y="594360"/>
             <a:ext cx="10515600" cy="640080"/>
           </a:xfrm>
           <a:prstGeom prst="rect">
@@ -3313,20 +3382,20 @@
               </a:defRPr>
             </a:pPr>
             <a:r>
-              <a:t>Live Demo — 60 Second Arc</a:t>
-            </a:r>
-          </a:p>
-        </p:txBody>
-      </p:sp>
-      <p:sp>
-        <p:nvSpPr>
-          <p:cNvPr id="4" name="TextBox 3"/>
-          <p:cNvSpPr txBox="1"/>
-          <p:nvPr/>
-        </p:nvSpPr>
-        <p:spPr>
-          <a:xfrm>
-            <a:off x="777240" y="960120"/>
+              <a:t>Originality &amp; Effort</a:t>
+            </a:r>
+          </a:p>
+        </p:txBody>
+      </p:sp>
+      <p:sp>
+        <p:nvSpPr>
+          <p:cNvPr id="5" name="TextBox 4"/>
+          <p:cNvSpPr txBox="1"/>
+          <p:nvPr/>
+        </p:nvSpPr>
+        <p:spPr>
+          <a:xfrm>
+            <a:off x="777240" y="1143000"/>
             <a:ext cx="10515600" cy="457200"/>
           </a:xfrm>
           <a:prstGeom prst="rect">
@@ -3348,42 +3417,7 @@
               </a:defRPr>
             </a:pPr>
             <a:r>
-              <a:t>Show, don't tell</a:t>
-            </a:r>
-          </a:p>
-        </p:txBody>
-      </p:sp>
-      <p:sp>
-        <p:nvSpPr>
-          <p:cNvPr id="5" name="TextBox 4"/>
-          <p:cNvSpPr txBox="1"/>
-          <p:nvPr/>
-        </p:nvSpPr>
-        <p:spPr>
-          <a:xfrm>
-            <a:off x="822960" y="1600200"/>
-            <a:ext cx="1097280" cy="320040"/>
-          </a:xfrm>
-          <a:prstGeom prst="rect">
-            <a:avLst/>
-          </a:prstGeom>
-          <a:noFill/>
-        </p:spPr>
-        <p:txBody>
-          <a:bodyPr wrap="square">
-            <a:spAutoFit/>
-          </a:bodyPr>
-          <a:lstStyle/>
-          <a:p>
-            <a:pPr algn="l">
-              <a:defRPr sz="1400" b="1">
-                <a:solidFill>
-                  <a:srgbClr val="F59E0B"/>
-                </a:solidFill>
-              </a:defRPr>
-            </a:pPr>
-            <a:r>
-              <a:t>0:00</a:t>
+              <a:t>Thoughtful problem-solving with clear implementation work</a:t>
             </a:r>
           </a:p>
         </p:txBody>
@@ -3396,29 +3430,92 @@
         </p:nvSpPr>
         <p:spPr>
           <a:xfrm>
-            <a:off x="2011680" y="1600200"/>
-            <a:ext cx="8686800" cy="320040"/>
-          </a:xfrm>
-          <a:prstGeom prst="rect">
-            <a:avLst/>
-          </a:prstGeom>
-          <a:noFill/>
-        </p:spPr>
-        <p:txBody>
-          <a:bodyPr wrap="square">
-            <a:spAutoFit/>
-          </a:bodyPr>
-          <a:lstStyle/>
-          <a:p>
-            <a:pPr algn="l">
-              <a:defRPr sz="1600" b="0">
+            <a:off x="822960" y="1691640"/>
+            <a:ext cx="10241280" cy="4114800"/>
+          </a:xfrm>
+          <a:prstGeom prst="rect">
+            <a:avLst/>
+          </a:prstGeom>
+          <a:noFill/>
+        </p:spPr>
+        <p:txBody>
+          <a:bodyPr wrap="square">
+            <a:spAutoFit/>
+          </a:bodyPr>
+          <a:lstStyle/>
+          <a:p>
+            <a:pPr>
+              <a:spcAft>
+                <a:spcPts val="800"/>
+              </a:spcAft>
+              <a:defRPr sz="1700">
                 <a:solidFill>
                   <a:srgbClr val="F8FAFC"/>
                 </a:solidFill>
               </a:defRPr>
             </a:pPr>
             <a:r>
-              <a:t>Zone map all GREEN — normal shift underground</a:t>
+              <a:t>Original: trend-based early warning + automated ventilation loop + cited voice alerts — combined offline</a:t>
+            </a:r>
+          </a:p>
+          <a:p>
+            <a:pPr>
+              <a:spcAft>
+                <a:spcPts val="800"/>
+              </a:spcAft>
+              <a:defRPr sz="1700">
+                <a:solidFill>
+                  <a:srgbClr val="F8FAFC"/>
+                </a:solidFill>
+              </a:defRPr>
+            </a:pPr>
+            <a:r>
+              <a:t>Not just a dashboard — the system ACTS (fan ramp) and SPEAKS (Reg 854 procedure)</a:t>
+            </a:r>
+          </a:p>
+          <a:p>
+            <a:pPr>
+              <a:spcAft>
+                <a:spcPts val="800"/>
+              </a:spcAft>
+              <a:defRPr sz="1700">
+                <a:solidFill>
+                  <a:srgbClr val="F8FAFC"/>
+                </a:solidFill>
+              </a:defRPr>
+            </a:pPr>
+            <a:r>
+              <a:t>Closed-loop simulator: gas inrush → danger → venting → recovery → repeat (demo-ready anytime)</a:t>
+            </a:r>
+          </a:p>
+          <a:p>
+            <a:pPr>
+              <a:spcAft>
+                <a:spcPts val="800"/>
+              </a:spcAft>
+              <a:defRPr sz="1700">
+                <a:solidFill>
+                  <a:srgbClr val="F8FAFC"/>
+                </a:solidFill>
+              </a:defRPr>
+            </a:pPr>
+            <a:r>
+              <a:t>Full vertical slice in 3 hours: MQTT · FastAPI · trend engine · Reg 854 · UI · voice · pitch deck</a:t>
+            </a:r>
+          </a:p>
+          <a:p>
+            <a:pPr>
+              <a:spcAft>
+                <a:spcPts val="800"/>
+              </a:spcAft>
+              <a:defRPr sz="1700">
+                <a:solidFill>
+                  <a:srgbClr val="F8FAFC"/>
+                </a:solidFill>
+              </a:defRPr>
+            </a:pPr>
+            <a:r>
+              <a:t>Built for the real constraint (no internet underground) — not retrofitted from a cloud app</a:t>
             </a:r>
           </a:p>
         </p:txBody>
@@ -3431,379 +3528,29 @@
         </p:nvSpPr>
         <p:spPr>
           <a:xfrm>
-            <a:off x="822960" y="2103120"/>
-            <a:ext cx="1097280" cy="320040"/>
-          </a:xfrm>
-          <a:prstGeom prst="rect">
-            <a:avLst/>
-          </a:prstGeom>
-          <a:noFill/>
-        </p:spPr>
-        <p:txBody>
-          <a:bodyPr wrap="square">
-            <a:spAutoFit/>
-          </a:bodyPr>
-          <a:lstStyle/>
-          <a:p>
-            <a:pPr algn="l">
-              <a:defRPr sz="1400" b="1">
-                <a:solidFill>
-                  <a:srgbClr val="F59E0B"/>
-                </a:solidFill>
-              </a:defRPr>
-            </a:pPr>
-            <a:r>
-              <a:t>0:15</a:t>
-            </a:r>
-          </a:p>
-        </p:txBody>
-      </p:sp>
-      <p:sp>
-        <p:nvSpPr>
-          <p:cNvPr id="8" name="TextBox 7"/>
-          <p:cNvSpPr txBox="1"/>
-          <p:nvPr/>
-        </p:nvSpPr>
-        <p:spPr>
-          <a:xfrm>
-            <a:off x="2011680" y="2103120"/>
-            <a:ext cx="8686800" cy="320040"/>
-          </a:xfrm>
-          <a:prstGeom prst="rect">
-            <a:avLst/>
-          </a:prstGeom>
-          <a:noFill/>
-        </p:spPr>
-        <p:txBody>
-          <a:bodyPr wrap="square">
-            <a:spAutoFit/>
-          </a:bodyPr>
-          <a:lstStyle/>
-          <a:p>
-            <a:pPr algn="l">
-              <a:defRPr sz="1600" b="0">
-                <a:solidFill>
-                  <a:srgbClr val="F8FAFC"/>
-                </a:solidFill>
-              </a:defRPr>
-            </a:pPr>
-            <a:r>
-              <a:t>Zone 3 methane starts CLIMBING → YELLOW + rising arrow</a:t>
-            </a:r>
-          </a:p>
-        </p:txBody>
-      </p:sp>
-      <p:sp>
-        <p:nvSpPr>
-          <p:cNvPr id="9" name="TextBox 8"/>
-          <p:cNvSpPr txBox="1"/>
-          <p:nvPr/>
-        </p:nvSpPr>
-        <p:spPr>
-          <a:xfrm>
-            <a:off x="822960" y="2606039"/>
-            <a:ext cx="1097280" cy="320040"/>
-          </a:xfrm>
-          <a:prstGeom prst="rect">
-            <a:avLst/>
-          </a:prstGeom>
-          <a:noFill/>
-        </p:spPr>
-        <p:txBody>
-          <a:bodyPr wrap="square">
-            <a:spAutoFit/>
-          </a:bodyPr>
-          <a:lstStyle/>
-          <a:p>
-            <a:pPr algn="l">
-              <a:defRPr sz="1400" b="1">
-                <a:solidFill>
-                  <a:srgbClr val="F59E0B"/>
-                </a:solidFill>
-              </a:defRPr>
-            </a:pPr>
-            <a:r>
-              <a:t>0:30</a:t>
-            </a:r>
-          </a:p>
-        </p:txBody>
-      </p:sp>
-      <p:sp>
-        <p:nvSpPr>
-          <p:cNvPr id="10" name="TextBox 9"/>
-          <p:cNvSpPr txBox="1"/>
-          <p:nvPr/>
-        </p:nvSpPr>
-        <p:spPr>
-          <a:xfrm>
-            <a:off x="2011680" y="2606039"/>
-            <a:ext cx="8686800" cy="320040"/>
-          </a:xfrm>
-          <a:prstGeom prst="rect">
-            <a:avLst/>
-          </a:prstGeom>
-          <a:noFill/>
-        </p:spPr>
-        <p:txBody>
-          <a:bodyPr wrap="square">
-            <a:spAutoFit/>
-          </a:bodyPr>
-          <a:lstStyle/>
-          <a:p>
-            <a:pPr algn="l">
-              <a:defRPr sz="1600" b="0">
-                <a:solidFill>
-                  <a:srgbClr val="F8FAFC"/>
-                </a:solidFill>
-              </a:defRPr>
-            </a:pPr>
-            <a:r>
-              <a:t>Fan ramps · ventilation mitigation active</a:t>
-            </a:r>
-          </a:p>
-        </p:txBody>
-      </p:sp>
-      <p:sp>
-        <p:nvSpPr>
-          <p:cNvPr id="11" name="TextBox 10"/>
-          <p:cNvSpPr txBox="1"/>
-          <p:nvPr/>
-        </p:nvSpPr>
-        <p:spPr>
-          <a:xfrm>
-            <a:off x="822960" y="3108959"/>
-            <a:ext cx="1097280" cy="320040"/>
-          </a:xfrm>
-          <a:prstGeom prst="rect">
-            <a:avLst/>
-          </a:prstGeom>
-          <a:noFill/>
-        </p:spPr>
-        <p:txBody>
-          <a:bodyPr wrap="square">
-            <a:spAutoFit/>
-          </a:bodyPr>
-          <a:lstStyle/>
-          <a:p>
-            <a:pPr algn="l">
-              <a:defRPr sz="1400" b="1">
-                <a:solidFill>
-                  <a:srgbClr val="F59E0B"/>
-                </a:solidFill>
-              </a:defRPr>
-            </a:pPr>
-            <a:r>
-              <a:t>0:40</a:t>
-            </a:r>
-          </a:p>
-        </p:txBody>
-      </p:sp>
-      <p:sp>
-        <p:nvSpPr>
-          <p:cNvPr id="12" name="TextBox 11"/>
-          <p:cNvSpPr txBox="1"/>
-          <p:nvPr/>
-        </p:nvSpPr>
-        <p:spPr>
-          <a:xfrm>
-            <a:off x="2011680" y="3108959"/>
-            <a:ext cx="8686800" cy="320040"/>
-          </a:xfrm>
-          <a:prstGeom prst="rect">
-            <a:avLst/>
-          </a:prstGeom>
-          <a:noFill/>
-        </p:spPr>
-        <p:txBody>
-          <a:bodyPr wrap="square">
-            <a:spAutoFit/>
-          </a:bodyPr>
-          <a:lstStyle/>
-          <a:p>
-            <a:pPr algn="l">
-              <a:defRPr sz="1600" b="0">
-                <a:solidFill>
-                  <a:srgbClr val="F8FAFC"/>
-                </a:solidFill>
-              </a:defRPr>
-            </a:pPr>
-            <a:r>
-              <a:t>Crosses 1.5% → RED · banner fires · voice speaks Reg 854 procedure</a:t>
-            </a:r>
-          </a:p>
-        </p:txBody>
-      </p:sp>
-      <p:sp>
-        <p:nvSpPr>
-          <p:cNvPr id="13" name="TextBox 12"/>
-          <p:cNvSpPr txBox="1"/>
-          <p:nvPr/>
-        </p:nvSpPr>
-        <p:spPr>
-          <a:xfrm>
-            <a:off x="822960" y="3611879"/>
-            <a:ext cx="1097280" cy="320040"/>
-          </a:xfrm>
-          <a:prstGeom prst="rect">
-            <a:avLst/>
-          </a:prstGeom>
-          <a:noFill/>
-        </p:spPr>
-        <p:txBody>
-          <a:bodyPr wrap="square">
-            <a:spAutoFit/>
-          </a:bodyPr>
-          <a:lstStyle/>
-          <a:p>
-            <a:pPr algn="l">
-              <a:defRPr sz="1400" b="1">
-                <a:solidFill>
-                  <a:srgbClr val="F59E0B"/>
-                </a:solidFill>
-              </a:defRPr>
-            </a:pPr>
-            <a:r>
-              <a:t>0:50</a:t>
-            </a:r>
-          </a:p>
-        </p:txBody>
-      </p:sp>
-      <p:sp>
-        <p:nvSpPr>
-          <p:cNvPr id="14" name="TextBox 13"/>
-          <p:cNvSpPr txBox="1"/>
-          <p:nvPr/>
-        </p:nvSpPr>
-        <p:spPr>
-          <a:xfrm>
-            <a:off x="2011680" y="3611879"/>
-            <a:ext cx="8686800" cy="320040"/>
-          </a:xfrm>
-          <a:prstGeom prst="rect">
-            <a:avLst/>
-          </a:prstGeom>
-          <a:noFill/>
-        </p:spPr>
-        <p:txBody>
-          <a:bodyPr wrap="square">
-            <a:spAutoFit/>
-          </a:bodyPr>
-          <a:lstStyle/>
-          <a:p>
-            <a:pPr algn="l">
-              <a:defRPr sz="1600" b="0">
-                <a:solidFill>
-                  <a:srgbClr val="F8FAFC"/>
-                </a:solidFill>
-              </a:defRPr>
-            </a:pPr>
-            <a:r>
-              <a:t>Turn WIFI OFF · demo again · still works</a:t>
-            </a:r>
-          </a:p>
-        </p:txBody>
-      </p:sp>
-      <p:sp>
-        <p:nvSpPr>
-          <p:cNvPr id="15" name="TextBox 14"/>
-          <p:cNvSpPr txBox="1"/>
-          <p:nvPr/>
-        </p:nvSpPr>
-        <p:spPr>
-          <a:xfrm>
-            <a:off x="822960" y="4114799"/>
-            <a:ext cx="1097280" cy="320040"/>
-          </a:xfrm>
-          <a:prstGeom prst="rect">
-            <a:avLst/>
-          </a:prstGeom>
-          <a:noFill/>
-        </p:spPr>
-        <p:txBody>
-          <a:bodyPr wrap="square">
-            <a:spAutoFit/>
-          </a:bodyPr>
-          <a:lstStyle/>
-          <a:p>
-            <a:pPr algn="l">
-              <a:defRPr sz="1400" b="1">
-                <a:solidFill>
-                  <a:srgbClr val="F59E0B"/>
-                </a:solidFill>
-              </a:defRPr>
-            </a:pPr>
-            <a:r>
-              <a:t>1:00</a:t>
-            </a:r>
-          </a:p>
-        </p:txBody>
-      </p:sp>
-      <p:sp>
-        <p:nvSpPr>
-          <p:cNvPr id="16" name="TextBox 15"/>
-          <p:cNvSpPr txBox="1"/>
-          <p:nvPr/>
-        </p:nvSpPr>
-        <p:spPr>
-          <a:xfrm>
-            <a:off x="2011680" y="4114799"/>
-            <a:ext cx="8686800" cy="320040"/>
-          </a:xfrm>
-          <a:prstGeom prst="rect">
-            <a:avLst/>
-          </a:prstGeom>
-          <a:noFill/>
-        </p:spPr>
-        <p:txBody>
-          <a:bodyPr wrap="square">
-            <a:spAutoFit/>
-          </a:bodyPr>
-          <a:lstStyle/>
-          <a:p>
-            <a:pPr algn="l">
-              <a:defRPr sz="1600" b="0">
-                <a:solidFill>
-                  <a:srgbClr val="F8FAFC"/>
-                </a:solidFill>
-              </a:defRPr>
-            </a:pPr>
-            <a:r>
-              <a:t>Zone clears → all-clear voice: "Zone 3 stabilized"</a:t>
-            </a:r>
-          </a:p>
-        </p:txBody>
-      </p:sp>
-      <p:sp>
-        <p:nvSpPr>
-          <p:cNvPr id="17" name="TextBox 16"/>
-          <p:cNvSpPr txBox="1"/>
-          <p:nvPr/>
-        </p:nvSpPr>
-        <p:spPr>
-          <a:xfrm>
-            <a:off x="822960" y="5486400"/>
-            <a:ext cx="10058400" cy="457200"/>
-          </a:xfrm>
-          <a:prstGeom prst="rect">
-            <a:avLst/>
-          </a:prstGeom>
-          <a:noFill/>
-        </p:spPr>
-        <p:txBody>
-          <a:bodyPr wrap="square">
-            <a:spAutoFit/>
-          </a:bodyPr>
-          <a:lstStyle/>
-          <a:p>
-            <a:pPr algn="l">
-              <a:defRPr sz="1200" b="0">
+            <a:off x="822960" y="5029200"/>
+            <a:ext cx="10515600" cy="731520"/>
+          </a:xfrm>
+          <a:prstGeom prst="rect">
+            <a:avLst/>
+          </a:prstGeom>
+          <a:noFill/>
+        </p:spPr>
+        <p:txBody>
+          <a:bodyPr wrap="square">
+            <a:spAutoFit/>
+          </a:bodyPr>
+          <a:lstStyle/>
+          <a:p>
+            <a:pPr algn="ctr">
+              <a:defRPr sz="1400" b="0">
                 <a:solidFill>
                   <a:srgbClr val="94A3B8"/>
                 </a:solidFill>
               </a:defRPr>
             </a:pPr>
             <a:r>
-              <a:t>Backup: pre-recorded demo video if live fails</a:t>
+              <a:t>Team split: Backend/Edge (B) · Frontend (F) · Voice + Pitch (V) — minimal overlap, maximum output</a:t>
             </a:r>
           </a:p>
         </p:txBody>
@@ -3907,7 +3654,7 @@
               </a:defRPr>
             </a:pPr>
             <a:r>
-              <a:t>What We Built vs. Production Vision</a:t>
+              <a:t>How We Meet Every Criterion</a:t>
             </a:r>
           </a:p>
         </p:txBody>
@@ -3942,7 +3689,7 @@
               </a:defRPr>
             </a:pPr>
             <a:r>
-              <a:t>Honest scope — judges respect this</a:t>
+              <a:t>Quick reference for judges</a:t>
             </a:r>
           </a:p>
         </p:txBody>
@@ -3955,8 +3702,8 @@
         </p:nvSpPr>
         <p:spPr>
           <a:xfrm>
-            <a:off x="822960" y="1554480"/>
-            <a:ext cx="5029200" cy="365760"/>
+            <a:off x="822960" y="1600200"/>
+            <a:ext cx="4114800" cy="320040"/>
           </a:xfrm>
           <a:prstGeom prst="rect">
             <a:avLst/>
@@ -3970,14 +3717,14 @@
           <a:lstStyle/>
           <a:p>
             <a:pPr algn="l">
-              <a:defRPr sz="1800" b="1">
-                <a:solidFill>
-                  <a:srgbClr val="22C55E"/>
-                </a:solidFill>
-              </a:defRPr>
-            </a:pPr>
-            <a:r>
-              <a:t>TODAY (3-hour build)</a:t>
+              <a:defRPr sz="1300" b="1">
+                <a:solidFill>
+                  <a:srgbClr val="F59E0B"/>
+                </a:solidFill>
+              </a:defRPr>
+            </a:pPr>
+            <a:r>
+              <a:t>1. Problem &amp; track alignment</a:t>
             </a:r>
           </a:p>
         </p:txBody>
@@ -3990,91 +3737,253 @@
         </p:nvSpPr>
         <p:spPr>
           <a:xfrm>
-            <a:off x="822960" y="2011680"/>
-            <a:ext cx="5029200" cy="3200400"/>
-          </a:xfrm>
-          <a:prstGeom prst="rect">
-            <a:avLst/>
-          </a:prstGeom>
-          <a:noFill/>
-        </p:spPr>
-        <p:txBody>
-          <a:bodyPr wrap="square">
-            <a:spAutoFit/>
-          </a:bodyPr>
-          <a:lstStyle/>
-          <a:p>
-            <a:pPr>
-              <a:spcAft>
-                <a:spcPts val="800"/>
-              </a:spcAft>
-              <a:defRPr sz="1500">
+            <a:off x="5029200" y="1600200"/>
+            <a:ext cx="6217920" cy="320040"/>
+          </a:xfrm>
+          <a:prstGeom prst="rect">
+            <a:avLst/>
+          </a:prstGeom>
+          <a:noFill/>
+        </p:spPr>
+        <p:txBody>
+          <a:bodyPr wrap="square">
+            <a:spAutoFit/>
+          </a:bodyPr>
+          <a:lstStyle/>
+          <a:p>
+            <a:pPr algn="l">
+              <a:defRPr sz="1300" b="0">
                 <a:solidFill>
                   <a:srgbClr val="F8FAFC"/>
                 </a:solidFill>
               </a:defRPr>
             </a:pPr>
             <a:r>
-              <a:t>Simulated zones on one laptop</a:t>
-            </a:r>
-          </a:p>
-          <a:p>
-            <a:pPr>
-              <a:spcAft>
-                <a:spcPts val="800"/>
-              </a:spcAft>
-              <a:defRPr sz="1500">
+              <a:t>Mining-track gas safety; also Health + Sustainability</a:t>
+            </a:r>
+          </a:p>
+        </p:txBody>
+      </p:sp>
+      <p:sp>
+        <p:nvSpPr>
+          <p:cNvPr id="7" name="TextBox 6"/>
+          <p:cNvSpPr txBox="1"/>
+          <p:nvPr/>
+        </p:nvSpPr>
+        <p:spPr>
+          <a:xfrm>
+            <a:off x="822960" y="2075688"/>
+            <a:ext cx="4114800" cy="320040"/>
+          </a:xfrm>
+          <a:prstGeom prst="rect">
+            <a:avLst/>
+          </a:prstGeom>
+          <a:noFill/>
+        </p:spPr>
+        <p:txBody>
+          <a:bodyPr wrap="square">
+            <a:spAutoFit/>
+          </a:bodyPr>
+          <a:lstStyle/>
+          <a:p>
+            <a:pPr algn="l">
+              <a:defRPr sz="1300" b="1">
+                <a:solidFill>
+                  <a:srgbClr val="F59E0B"/>
+                </a:solidFill>
+              </a:defRPr>
+            </a:pPr>
+            <a:r>
+              <a:t>2. Solution design</a:t>
+            </a:r>
+          </a:p>
+        </p:txBody>
+      </p:sp>
+      <p:sp>
+        <p:nvSpPr>
+          <p:cNvPr id="8" name="TextBox 7"/>
+          <p:cNvSpPr txBox="1"/>
+          <p:nvPr/>
+        </p:nvSpPr>
+        <p:spPr>
+          <a:xfrm>
+            <a:off x="5029200" y="2075688"/>
+            <a:ext cx="6217920" cy="320040"/>
+          </a:xfrm>
+          <a:prstGeom prst="rect">
+            <a:avLst/>
+          </a:prstGeom>
+          <a:noFill/>
+        </p:spPr>
+        <p:txBody>
+          <a:bodyPr wrap="square">
+            <a:spAutoFit/>
+          </a:bodyPr>
+          <a:lstStyle/>
+          <a:p>
+            <a:pPr algn="l">
+              <a:defRPr sz="1300" b="0">
                 <a:solidFill>
                   <a:srgbClr val="F8FAFC"/>
                 </a:solidFill>
               </a:defRPr>
             </a:pPr>
             <a:r>
-              <a:t>Local MQTT or internal timer</a:t>
-            </a:r>
-          </a:p>
-          <a:p>
-            <a:pPr>
-              <a:spcAft>
-                <a:spcPts val="800"/>
-              </a:spcAft>
-              <a:defRPr sz="1500">
+              <a:t>Edge offline system for real supervisors and crews</a:t>
+            </a:r>
+          </a:p>
+        </p:txBody>
+      </p:sp>
+      <p:sp>
+        <p:nvSpPr>
+          <p:cNvPr id="9" name="TextBox 8"/>
+          <p:cNvSpPr txBox="1"/>
+          <p:nvPr/>
+        </p:nvSpPr>
+        <p:spPr>
+          <a:xfrm>
+            <a:off x="822960" y="2551176"/>
+            <a:ext cx="4114800" cy="320040"/>
+          </a:xfrm>
+          <a:prstGeom prst="rect">
+            <a:avLst/>
+          </a:prstGeom>
+          <a:noFill/>
+        </p:spPr>
+        <p:txBody>
+          <a:bodyPr wrap="square">
+            <a:spAutoFit/>
+          </a:bodyPr>
+          <a:lstStyle/>
+          <a:p>
+            <a:pPr algn="l">
+              <a:defRPr sz="1300" b="1">
+                <a:solidFill>
+                  <a:srgbClr val="F59E0B"/>
+                </a:solidFill>
+              </a:defRPr>
+            </a:pPr>
+            <a:r>
+              <a:t>3. Working prototype</a:t>
+            </a:r>
+          </a:p>
+        </p:txBody>
+      </p:sp>
+      <p:sp>
+        <p:nvSpPr>
+          <p:cNvPr id="10" name="TextBox 9"/>
+          <p:cNvSpPr txBox="1"/>
+          <p:nvPr/>
+        </p:nvSpPr>
+        <p:spPr>
+          <a:xfrm>
+            <a:off x="5029200" y="2551176"/>
+            <a:ext cx="6217920" cy="320040"/>
+          </a:xfrm>
+          <a:prstGeom prst="rect">
+            <a:avLst/>
+          </a:prstGeom>
+          <a:noFill/>
+        </p:spPr>
+        <p:txBody>
+          <a:bodyPr wrap="square">
+            <a:spAutoFit/>
+          </a:bodyPr>
+          <a:lstStyle/>
+          <a:p>
+            <a:pPr algn="l">
+              <a:defRPr sz="1300" b="0">
                 <a:solidFill>
                   <a:srgbClr val="F8FAFC"/>
                 </a:solidFill>
               </a:defRPr>
             </a:pPr>
             <a:r>
-              <a:t>Full API + trend + ventilation loop</a:t>
-            </a:r>
-          </a:p>
-          <a:p>
-            <a:pPr>
-              <a:spcAft>
-                <a:spcPts val="800"/>
-              </a:spcAft>
-              <a:defRPr sz="1500">
+              <a:t>Live API, 4 zones, trend + ventilation + Reg 854 — demo now</a:t>
+            </a:r>
+          </a:p>
+        </p:txBody>
+      </p:sp>
+      <p:sp>
+        <p:nvSpPr>
+          <p:cNvPr id="11" name="TextBox 10"/>
+          <p:cNvSpPr txBox="1"/>
+          <p:nvPr/>
+        </p:nvSpPr>
+        <p:spPr>
+          <a:xfrm>
+            <a:off x="822960" y="3026664"/>
+            <a:ext cx="4114800" cy="320040"/>
+          </a:xfrm>
+          <a:prstGeom prst="rect">
+            <a:avLst/>
+          </a:prstGeom>
+          <a:noFill/>
+        </p:spPr>
+        <p:txBody>
+          <a:bodyPr wrap="square">
+            <a:spAutoFit/>
+          </a:bodyPr>
+          <a:lstStyle/>
+          <a:p>
+            <a:pPr algn="l">
+              <a:defRPr sz="1300" b="1">
+                <a:solidFill>
+                  <a:srgbClr val="F59E0B"/>
+                </a:solidFill>
+              </a:defRPr>
+            </a:pPr>
+            <a:r>
+              <a:t>4. Impact &amp; feasibility</a:t>
+            </a:r>
+          </a:p>
+        </p:txBody>
+      </p:sp>
+      <p:sp>
+        <p:nvSpPr>
+          <p:cNvPr id="12" name="TextBox 11"/>
+          <p:cNvSpPr txBox="1"/>
+          <p:nvPr/>
+        </p:nvSpPr>
+        <p:spPr>
+          <a:xfrm>
+            <a:off x="5029200" y="3026664"/>
+            <a:ext cx="6217920" cy="320040"/>
+          </a:xfrm>
+          <a:prstGeom prst="rect">
+            <a:avLst/>
+          </a:prstGeom>
+          <a:noFill/>
+        </p:spPr>
+        <p:txBody>
+          <a:bodyPr wrap="square">
+            <a:spAutoFit/>
+          </a:bodyPr>
+          <a:lstStyle/>
+          <a:p>
+            <a:pPr algn="l">
+              <a:defRPr sz="1300" b="0">
                 <a:solidFill>
                   <a:srgbClr val="F8FAFC"/>
                 </a:solidFill>
               </a:defRPr>
             </a:pPr>
             <a:r>
-              <a:t>Offline demo with wifi disabled</a:t>
-            </a:r>
-          </a:p>
-        </p:txBody>
-      </p:sp>
-      <p:sp>
-        <p:nvSpPr>
-          <p:cNvPr id="7" name="TextBox 6"/>
-          <p:cNvSpPr txBox="1"/>
-          <p:nvPr/>
-        </p:nvSpPr>
-        <p:spPr>
-          <a:xfrm>
-            <a:off x="6400800" y="1554480"/>
-            <a:ext cx="5029200" cy="365760"/>
+              <a:t>Saves lives, saves power; 4-phase deployment path</a:t>
+            </a:r>
+          </a:p>
+        </p:txBody>
+      </p:sp>
+      <p:sp>
+        <p:nvSpPr>
+          <p:cNvPr id="13" name="TextBox 12"/>
+          <p:cNvSpPr txBox="1"/>
+          <p:nvPr/>
+        </p:nvSpPr>
+        <p:spPr>
+          <a:xfrm>
+            <a:off x="822960" y="3502152"/>
+            <a:ext cx="4114800" cy="320040"/>
           </a:xfrm>
           <a:prstGeom prst="rect">
             <a:avLst/>
@@ -4088,97 +3997,189 @@
           <a:lstStyle/>
           <a:p>
             <a:pPr algn="l">
-              <a:defRPr sz="1800" b="1">
+              <a:defRPr sz="1300" b="1">
                 <a:solidFill>
                   <a:srgbClr val="F59E0B"/>
                 </a:solidFill>
               </a:defRPr>
             </a:pPr>
             <a:r>
-              <a:t>PRODUCTION (the pitch)</a:t>
-            </a:r>
-          </a:p>
-        </p:txBody>
-      </p:sp>
-      <p:sp>
-        <p:nvSpPr>
-          <p:cNvPr id="8" name="TextBox 7"/>
-          <p:cNvSpPr txBox="1"/>
-          <p:nvPr/>
-        </p:nvSpPr>
-        <p:spPr>
-          <a:xfrm>
-            <a:off x="6400800" y="2011680"/>
-            <a:ext cx="5029200" cy="3200400"/>
-          </a:xfrm>
-          <a:prstGeom prst="rect">
-            <a:avLst/>
-          </a:prstGeom>
-          <a:noFill/>
-        </p:spPr>
-        <p:txBody>
-          <a:bodyPr wrap="square">
-            <a:spAutoFit/>
-          </a:bodyPr>
-          <a:lstStyle/>
-          <a:p>
-            <a:pPr>
-              <a:spcAft>
-                <a:spcPts val="800"/>
-              </a:spcAft>
-              <a:defRPr sz="1500">
+              <a:t>5. Presentation &amp; pitch</a:t>
+            </a:r>
+          </a:p>
+        </p:txBody>
+      </p:sp>
+      <p:sp>
+        <p:nvSpPr>
+          <p:cNvPr id="14" name="TextBox 13"/>
+          <p:cNvSpPr txBox="1"/>
+          <p:nvPr/>
+        </p:nvSpPr>
+        <p:spPr>
+          <a:xfrm>
+            <a:off x="5029200" y="3502152"/>
+            <a:ext cx="6217920" cy="320040"/>
+          </a:xfrm>
+          <a:prstGeom prst="rect">
+            <a:avLst/>
+          </a:prstGeom>
+          <a:noFill/>
+        </p:spPr>
+        <p:txBody>
+          <a:bodyPr wrap="square">
+            <a:spAutoFit/>
+          </a:bodyPr>
+          <a:lstStyle/>
+          <a:p>
+            <a:pPr algn="l">
+              <a:defRPr sz="1300" b="0">
                 <a:solidFill>
                   <a:srgbClr val="F8FAFC"/>
                 </a:solidFill>
               </a:defRPr>
             </a:pPr>
             <a:r>
-              <a:t>Real sensor node per zone</a:t>
-            </a:r>
-          </a:p>
-          <a:p>
-            <a:pPr>
-              <a:spcAft>
-                <a:spcPts val="800"/>
-              </a:spcAft>
-              <a:defRPr sz="1500">
+              <a:t>60s demo: green → trend → red → wifi off → all clear</a:t>
+            </a:r>
+          </a:p>
+        </p:txBody>
+      </p:sp>
+      <p:sp>
+        <p:nvSpPr>
+          <p:cNvPr id="15" name="TextBox 14"/>
+          <p:cNvSpPr txBox="1"/>
+          <p:nvPr/>
+        </p:nvSpPr>
+        <p:spPr>
+          <a:xfrm>
+            <a:off x="822960" y="3977639"/>
+            <a:ext cx="4114800" cy="320040"/>
+          </a:xfrm>
+          <a:prstGeom prst="rect">
+            <a:avLst/>
+          </a:prstGeom>
+          <a:noFill/>
+        </p:spPr>
+        <p:txBody>
+          <a:bodyPr wrap="square">
+            <a:spAutoFit/>
+          </a:bodyPr>
+          <a:lstStyle/>
+          <a:p>
+            <a:pPr algn="l">
+              <a:defRPr sz="1300" b="1">
+                <a:solidFill>
+                  <a:srgbClr val="F59E0B"/>
+                </a:solidFill>
+              </a:defRPr>
+            </a:pPr>
+            <a:r>
+              <a:t>6. Responsible design</a:t>
+            </a:r>
+          </a:p>
+        </p:txBody>
+      </p:sp>
+      <p:sp>
+        <p:nvSpPr>
+          <p:cNvPr id="16" name="TextBox 15"/>
+          <p:cNvSpPr txBox="1"/>
+          <p:nvPr/>
+        </p:nvSpPr>
+        <p:spPr>
+          <a:xfrm>
+            <a:off x="5029200" y="3977639"/>
+            <a:ext cx="6217920" cy="320040"/>
+          </a:xfrm>
+          <a:prstGeom prst="rect">
+            <a:avLst/>
+          </a:prstGeom>
+          <a:noFill/>
+        </p:spPr>
+        <p:txBody>
+          <a:bodyPr wrap="square">
+            <a:spAutoFit/>
+          </a:bodyPr>
+          <a:lstStyle/>
+          <a:p>
+            <a:pPr algn="l">
+              <a:defRPr sz="1300" b="0">
                 <a:solidFill>
                   <a:srgbClr val="F8FAFC"/>
                 </a:solidFill>
               </a:defRPr>
             </a:pPr>
             <a:r>
-              <a:t>Wireless self-healing mesh transport</a:t>
-            </a:r>
-          </a:p>
-          <a:p>
-            <a:pPr>
-              <a:spcAft>
-                <a:spcPts val="800"/>
-              </a:spcAft>
-              <a:defRPr sz="1500">
+              <a:t>Safety-aware; honest about demo vs production scope</a:t>
+            </a:r>
+          </a:p>
+        </p:txBody>
+      </p:sp>
+      <p:sp>
+        <p:nvSpPr>
+          <p:cNvPr id="17" name="TextBox 16"/>
+          <p:cNvSpPr txBox="1"/>
+          <p:nvPr/>
+        </p:nvSpPr>
+        <p:spPr>
+          <a:xfrm>
+            <a:off x="822960" y="4453127"/>
+            <a:ext cx="4114800" cy="320040"/>
+          </a:xfrm>
+          <a:prstGeom prst="rect">
+            <a:avLst/>
+          </a:prstGeom>
+          <a:noFill/>
+        </p:spPr>
+        <p:txBody>
+          <a:bodyPr wrap="square">
+            <a:spAutoFit/>
+          </a:bodyPr>
+          <a:lstStyle/>
+          <a:p>
+            <a:pPr algn="l">
+              <a:defRPr sz="1300" b="1">
+                <a:solidFill>
+                  <a:srgbClr val="F59E0B"/>
+                </a:solidFill>
+              </a:defRPr>
+            </a:pPr>
+            <a:r>
+              <a:t>7. Originality &amp; effort</a:t>
+            </a:r>
+          </a:p>
+        </p:txBody>
+      </p:sp>
+      <p:sp>
+        <p:nvSpPr>
+          <p:cNvPr id="18" name="TextBox 17"/>
+          <p:cNvSpPr txBox="1"/>
+          <p:nvPr/>
+        </p:nvSpPr>
+        <p:spPr>
+          <a:xfrm>
+            <a:off x="5029200" y="4453127"/>
+            <a:ext cx="6217920" cy="320040"/>
+          </a:xfrm>
+          <a:prstGeom prst="rect">
+            <a:avLst/>
+          </a:prstGeom>
+          <a:noFill/>
+        </p:spPr>
+        <p:txBody>
+          <a:bodyPr wrap="square">
+            <a:spAutoFit/>
+          </a:bodyPr>
+          <a:lstStyle/>
+          <a:p>
+            <a:pPr algn="l">
+              <a:defRPr sz="1300" b="0">
                 <a:solidFill>
                   <a:srgbClr val="F8FAFC"/>
                 </a:solidFill>
               </a:defRPr>
             </a:pPr>
             <a:r>
-              <a:t>Edge box underground, sync at surface</a:t>
-            </a:r>
-          </a:p>
-          <a:p>
-            <a:pPr>
-              <a:spcAft>
-                <a:spcPts val="800"/>
-              </a:spcAft>
-              <a:defRPr sz="1500">
-                <a:solidFill>
-                  <a:srgbClr val="F8FAFC"/>
-                </a:solidFill>
-              </a:defRPr>
-            </a:pPr>
-            <a:r>
-              <a:t>On-device TTS in cap lamp / tablet</a:t>
+              <a:t>Trend + act + speak offline; full stack in 3 hours</a:t>
             </a:r>
           </a:p>
         </p:txBody>
@@ -4282,7 +4283,7 @@
               </a:defRPr>
             </a:pPr>
             <a:r>
-              <a:t>Impact</a:t>
+              <a:t>What We Built vs. Production Vision</a:t>
             </a:r>
           </a:p>
         </p:txBody>
@@ -4317,7 +4318,7 @@
               </a:defRPr>
             </a:pPr>
             <a:r>
-              <a:t>Why mining judges should care</a:t>
+              <a:t>Transparent scope</a:t>
             </a:r>
           </a:p>
         </p:txBody>
@@ -4331,7 +4332,42 @@
         <p:spPr>
           <a:xfrm>
             <a:off x="822960" y="1554480"/>
-            <a:ext cx="10241280" cy="4114800"/>
+            <a:ext cx="5029200" cy="365760"/>
+          </a:xfrm>
+          <a:prstGeom prst="rect">
+            <a:avLst/>
+          </a:prstGeom>
+          <a:noFill/>
+        </p:spPr>
+        <p:txBody>
+          <a:bodyPr wrap="square">
+            <a:spAutoFit/>
+          </a:bodyPr>
+          <a:lstStyle/>
+          <a:p>
+            <a:pPr algn="l">
+              <a:defRPr sz="1800" b="1">
+                <a:solidFill>
+                  <a:srgbClr val="22C55E"/>
+                </a:solidFill>
+              </a:defRPr>
+            </a:pPr>
+            <a:r>
+              <a:t>TODAY (hackathon build)</a:t>
+            </a:r>
+          </a:p>
+        </p:txBody>
+      </p:sp>
+      <p:sp>
+        <p:nvSpPr>
+          <p:cNvPr id="6" name="TextBox 5"/>
+          <p:cNvSpPr txBox="1"/>
+          <p:nvPr/>
+        </p:nvSpPr>
+        <p:spPr>
+          <a:xfrm>
+            <a:off x="822960" y="1965960"/>
+            <a:ext cx="5029200" cy="3200400"/>
           </a:xfrm>
           <a:prstGeom prst="rect">
             <a:avLst/>
@@ -4348,14 +4384,14 @@
               <a:spcAft>
                 <a:spcPts val="800"/>
               </a:spcAft>
-              <a:defRPr sz="1800">
+              <a:defRPr sz="1500">
                 <a:solidFill>
                   <a:srgbClr val="F8FAFC"/>
                 </a:solidFill>
               </a:defRPr>
             </a:pPr>
             <a:r>
-              <a:t>Early warning → orderly withdrawal, not emergency evacuation</a:t>
+              <a:t>Simulated zones on one laptop</a:t>
             </a:r>
           </a:p>
           <a:p>
@@ -4363,14 +4399,14 @@
               <a:spcAft>
                 <a:spcPts val="800"/>
               </a:spcAft>
-              <a:defRPr sz="1800">
+              <a:defRPr sz="1500">
                 <a:solidFill>
                   <a:srgbClr val="F8FAFC"/>
                 </a:solidFill>
               </a:defRPr>
             </a:pPr>
             <a:r>
-              <a:t>Offline-first → works when comms are damaged during roof falls</a:t>
+              <a:t>Local MQTT or internal timer fallback</a:t>
             </a:r>
           </a:p>
           <a:p>
@@ -4378,14 +4414,14 @@
               <a:spcAft>
                 <a:spcPts val="800"/>
               </a:spcAft>
-              <a:defRPr sz="1800">
+              <a:defRPr sz="1500">
                 <a:solidFill>
                   <a:srgbClr val="F8FAFC"/>
                 </a:solidFill>
               </a:defRPr>
             </a:pPr>
             <a:r>
-              <a:t>No central server → no single point of failure underground</a:t>
+              <a:t>Full API + trend + ventilation + Reg 854</a:t>
             </a:r>
           </a:p>
           <a:p>
@@ -4393,29 +4429,132 @@
               <a:spcAft>
                 <a:spcPts val="800"/>
               </a:spcAft>
-              <a:defRPr sz="1800">
+              <a:defRPr sz="1500">
                 <a:solidFill>
                   <a:srgbClr val="F8FAFC"/>
                 </a:solidFill>
               </a:defRPr>
             </a:pPr>
             <a:r>
-              <a:t>Cited procedures → auditable safety decisions for inspectors</a:t>
-            </a:r>
-          </a:p>
+              <a:t>Offline demo with wifi disabled</a:t>
+            </a:r>
+          </a:p>
+        </p:txBody>
+      </p:sp>
+      <p:sp>
+        <p:nvSpPr>
+          <p:cNvPr id="7" name="TextBox 6"/>
+          <p:cNvSpPr txBox="1"/>
+          <p:nvPr/>
+        </p:nvSpPr>
+        <p:spPr>
+          <a:xfrm>
+            <a:off x="6400800" y="1554480"/>
+            <a:ext cx="5029200" cy="365760"/>
+          </a:xfrm>
+          <a:prstGeom prst="rect">
+            <a:avLst/>
+          </a:prstGeom>
+          <a:noFill/>
+        </p:spPr>
+        <p:txBody>
+          <a:bodyPr wrap="square">
+            <a:spAutoFit/>
+          </a:bodyPr>
+          <a:lstStyle/>
+          <a:p>
+            <a:pPr algn="l">
+              <a:defRPr sz="1800" b="1">
+                <a:solidFill>
+                  <a:srgbClr val="F59E0B"/>
+                </a:solidFill>
+              </a:defRPr>
+            </a:pPr>
+            <a:r>
+              <a:t>PRODUCTION (deployment)</a:t>
+            </a:r>
+          </a:p>
+        </p:txBody>
+      </p:sp>
+      <p:sp>
+        <p:nvSpPr>
+          <p:cNvPr id="8" name="TextBox 7"/>
+          <p:cNvSpPr txBox="1"/>
+          <p:nvPr/>
+        </p:nvSpPr>
+        <p:spPr>
+          <a:xfrm>
+            <a:off x="6400800" y="1965960"/>
+            <a:ext cx="5029200" cy="3200400"/>
+          </a:xfrm>
+          <a:prstGeom prst="rect">
+            <a:avLst/>
+          </a:prstGeom>
+          <a:noFill/>
+        </p:spPr>
+        <p:txBody>
+          <a:bodyPr wrap="square">
+            <a:spAutoFit/>
+          </a:bodyPr>
+          <a:lstStyle/>
           <a:p>
             <a:pPr>
               <a:spcAft>
                 <a:spcPts val="800"/>
               </a:spcAft>
-              <a:defRPr sz="1800">
+              <a:defRPr sz="1500">
                 <a:solidFill>
                   <a:srgbClr val="F8FAFC"/>
                 </a:solidFill>
               </a:defRPr>
             </a:pPr>
             <a:r>
-              <a:t>Same architecture major operators already deploy (mesh + MQTT + edge)</a:t>
+              <a:t>Real sensor node per zone on mesh network</a:t>
+            </a:r>
+          </a:p>
+          <a:p>
+            <a:pPr>
+              <a:spcAft>
+                <a:spcPts val="800"/>
+              </a:spcAft>
+              <a:defRPr sz="1500">
+                <a:solidFill>
+                  <a:srgbClr val="F8FAFC"/>
+                </a:solidFill>
+              </a:defRPr>
+            </a:pPr>
+            <a:r>
+              <a:t>Wireless self-healing transport (no leaky feeder)</a:t>
+            </a:r>
+          </a:p>
+          <a:p>
+            <a:pPr>
+              <a:spcAft>
+                <a:spcPts val="800"/>
+              </a:spcAft>
+              <a:defRPr sz="1500">
+                <a:solidFill>
+                  <a:srgbClr val="F8FAFC"/>
+                </a:solidFill>
+              </a:defRPr>
+            </a:pPr>
+            <a:r>
+              <a:t>Edge box underground, sync at surface</a:t>
+            </a:r>
+          </a:p>
+          <a:p>
+            <a:pPr>
+              <a:spcAft>
+                <a:spcPts val="800"/>
+              </a:spcAft>
+              <a:defRPr sz="1500">
+                <a:solidFill>
+                  <a:srgbClr val="F8FAFC"/>
+                </a:solidFill>
+              </a:defRPr>
+            </a:pPr>
+            <a:r>
+              <a:t>On-device TTS in cap lamp / rugged tablet</a:t>
             </a:r>
           </a:p>
         </p:txBody>
@@ -4448,362 +4587,13 @@
       <p:grpSpPr/>
       <p:sp>
         <p:nvSpPr>
-          <p:cNvPr id="2" name="Rectangle 1"/>
-          <p:cNvSpPr/>
-          <p:nvPr/>
-        </p:nvSpPr>
-        <p:spPr>
-          <a:xfrm>
-            <a:off x="548640" y="502920"/>
-            <a:ext cx="73152" cy="502920"/>
-          </a:xfrm>
-          <a:prstGeom prst="rect">
-            <a:avLst/>
-          </a:prstGeom>
-          <a:solidFill>
-            <a:srgbClr val="F59E0B"/>
-          </a:solidFill>
-          <a:ln>
-            <a:noFill/>
-          </a:ln>
-        </p:spPr>
-        <p:style>
-          <a:lnRef idx="1">
-            <a:schemeClr val="accent1"/>
-          </a:lnRef>
-          <a:fillRef idx="3">
-            <a:schemeClr val="accent1"/>
-          </a:fillRef>
-          <a:effectRef idx="2">
-            <a:schemeClr val="accent1"/>
-          </a:effectRef>
-          <a:fontRef idx="minor">
-            <a:schemeClr val="lt1"/>
-          </a:fontRef>
-        </p:style>
-        <p:txBody>
-          <a:bodyPr rtlCol="0" anchor="ctr"/>
-          <a:lstStyle/>
-          <a:p>
-            <a:pPr algn="ctr"/>
-          </a:p>
-        </p:txBody>
-      </p:sp>
-      <p:sp>
-        <p:nvSpPr>
-          <p:cNvPr id="3" name="TextBox 2"/>
-          <p:cNvSpPr txBox="1"/>
-          <p:nvPr/>
-        </p:nvSpPr>
-        <p:spPr>
-          <a:xfrm>
-            <a:off x="777240" y="411480"/>
-            <a:ext cx="10515600" cy="640080"/>
-          </a:xfrm>
-          <a:prstGeom prst="rect">
-            <a:avLst/>
-          </a:prstGeom>
-          <a:noFill/>
-        </p:spPr>
-        <p:txBody>
-          <a:bodyPr wrap="square">
-            <a:spAutoFit/>
-          </a:bodyPr>
-          <a:lstStyle/>
-          <a:p>
-            <a:pPr algn="l">
-              <a:defRPr sz="3200" b="1">
-                <a:solidFill>
-                  <a:srgbClr val="F8FAFC"/>
-                </a:solidFill>
-              </a:defRPr>
-            </a:pPr>
-            <a:r>
-              <a:t>Team</a:t>
-            </a:r>
-          </a:p>
-        </p:txBody>
-      </p:sp>
-      <p:sp>
-        <p:nvSpPr>
-          <p:cNvPr id="4" name="TextBox 3"/>
-          <p:cNvSpPr txBox="1"/>
-          <p:nvPr/>
-        </p:nvSpPr>
-        <p:spPr>
-          <a:xfrm>
-            <a:off x="777240" y="960120"/>
-            <a:ext cx="10515600" cy="457200"/>
-          </a:xfrm>
-          <a:prstGeom prst="rect">
-            <a:avLst/>
-          </a:prstGeom>
-          <a:noFill/>
-        </p:spPr>
-        <p:txBody>
-          <a:bodyPr wrap="square">
-            <a:spAutoFit/>
-          </a:bodyPr>
-          <a:lstStyle/>
-          <a:p>
-            <a:pPr algn="l">
-              <a:defRPr sz="1400" b="0">
-                <a:solidFill>
-                  <a:srgbClr val="94A3B8"/>
-                </a:solidFill>
-              </a:defRPr>
-            </a:pPr>
-            <a:r>
-              <a:t>Three roles, one vertical slice</a:t>
-            </a:r>
-          </a:p>
-        </p:txBody>
-      </p:sp>
-      <p:sp>
-        <p:nvSpPr>
-          <p:cNvPr id="5" name="TextBox 4"/>
+          <p:cNvPr id="2" name="TextBox 1"/>
           <p:cNvSpPr txBox="1"/>
           <p:nvPr/>
         </p:nvSpPr>
         <p:spPr>
           <a:xfrm>
             <a:off x="822960" y="1828800"/>
-            <a:ext cx="3657600" cy="365760"/>
-          </a:xfrm>
-          <a:prstGeom prst="rect">
-            <a:avLst/>
-          </a:prstGeom>
-          <a:noFill/>
-        </p:spPr>
-        <p:txBody>
-          <a:bodyPr wrap="square">
-            <a:spAutoFit/>
-          </a:bodyPr>
-          <a:lstStyle/>
-          <a:p>
-            <a:pPr algn="l">
-              <a:defRPr sz="1800" b="1">
-                <a:solidFill>
-                  <a:srgbClr val="F59E0B"/>
-                </a:solidFill>
-              </a:defRPr>
-            </a:pPr>
-            <a:r>
-              <a:t>Backend / Edge (B)</a:t>
-            </a:r>
-          </a:p>
-        </p:txBody>
-      </p:sp>
-      <p:sp>
-        <p:nvSpPr>
-          <p:cNvPr id="6" name="TextBox 5"/>
-          <p:cNvSpPr txBox="1"/>
-          <p:nvPr/>
-        </p:nvSpPr>
-        <p:spPr>
-          <a:xfrm>
-            <a:off x="822960" y="2240280"/>
-            <a:ext cx="10058400" cy="365760"/>
-          </a:xfrm>
-          <a:prstGeom prst="rect">
-            <a:avLst/>
-          </a:prstGeom>
-          <a:noFill/>
-        </p:spPr>
-        <p:txBody>
-          <a:bodyPr wrap="square">
-            <a:spAutoFit/>
-          </a:bodyPr>
-          <a:lstStyle/>
-          <a:p>
-            <a:pPr algn="l">
-              <a:defRPr sz="1600" b="0">
-                <a:solidFill>
-                  <a:srgbClr val="F8FAFC"/>
-                </a:solidFill>
-              </a:defRPr>
-            </a:pPr>
-            <a:r>
-              <a:t>MQTT · simulators · trend · FastAPI · Reg 854</a:t>
-            </a:r>
-          </a:p>
-        </p:txBody>
-      </p:sp>
-      <p:sp>
-        <p:nvSpPr>
-          <p:cNvPr id="7" name="TextBox 6"/>
-          <p:cNvSpPr txBox="1"/>
-          <p:nvPr/>
-        </p:nvSpPr>
-        <p:spPr>
-          <a:xfrm>
-            <a:off x="822960" y="2834640"/>
-            <a:ext cx="3657600" cy="365760"/>
-          </a:xfrm>
-          <a:prstGeom prst="rect">
-            <a:avLst/>
-          </a:prstGeom>
-          <a:noFill/>
-        </p:spPr>
-        <p:txBody>
-          <a:bodyPr wrap="square">
-            <a:spAutoFit/>
-          </a:bodyPr>
-          <a:lstStyle/>
-          <a:p>
-            <a:pPr algn="l">
-              <a:defRPr sz="1800" b="1">
-                <a:solidFill>
-                  <a:srgbClr val="F59E0B"/>
-                </a:solidFill>
-              </a:defRPr>
-            </a:pPr>
-            <a:r>
-              <a:t>Frontend (F)</a:t>
-            </a:r>
-          </a:p>
-        </p:txBody>
-      </p:sp>
-      <p:sp>
-        <p:nvSpPr>
-          <p:cNvPr id="8" name="TextBox 7"/>
-          <p:cNvSpPr txBox="1"/>
-          <p:nvPr/>
-        </p:nvSpPr>
-        <p:spPr>
-          <a:xfrm>
-            <a:off x="822960" y="3246120"/>
-            <a:ext cx="10058400" cy="365760"/>
-          </a:xfrm>
-          <a:prstGeom prst="rect">
-            <a:avLst/>
-          </a:prstGeom>
-          <a:noFill/>
-        </p:spPr>
-        <p:txBody>
-          <a:bodyPr wrap="square">
-            <a:spAutoFit/>
-          </a:bodyPr>
-          <a:lstStyle/>
-          <a:p>
-            <a:pPr algn="l">
-              <a:defRPr sz="1600" b="0">
-                <a:solidFill>
-                  <a:srgbClr val="F8FAFC"/>
-                </a:solidFill>
-              </a:defRPr>
-            </a:pPr>
-            <a:r>
-              <a:t>Zone map · alerts · Lovable UI · local export</a:t>
-            </a:r>
-          </a:p>
-        </p:txBody>
-      </p:sp>
-      <p:sp>
-        <p:nvSpPr>
-          <p:cNvPr id="9" name="TextBox 8"/>
-          <p:cNvSpPr txBox="1"/>
-          <p:nvPr/>
-        </p:nvSpPr>
-        <p:spPr>
-          <a:xfrm>
-            <a:off x="822960" y="3840480"/>
-            <a:ext cx="3657600" cy="365760"/>
-          </a:xfrm>
-          <a:prstGeom prst="rect">
-            <a:avLst/>
-          </a:prstGeom>
-          <a:noFill/>
-        </p:spPr>
-        <p:txBody>
-          <a:bodyPr wrap="square">
-            <a:spAutoFit/>
-          </a:bodyPr>
-          <a:lstStyle/>
-          <a:p>
-            <a:pPr algn="l">
-              <a:defRPr sz="1800" b="1">
-                <a:solidFill>
-                  <a:srgbClr val="F59E0B"/>
-                </a:solidFill>
-              </a:defRPr>
-            </a:pPr>
-            <a:r>
-              <a:t>Voice + Pitch (V)</a:t>
-            </a:r>
-          </a:p>
-        </p:txBody>
-      </p:sp>
-      <p:sp>
-        <p:nvSpPr>
-          <p:cNvPr id="10" name="TextBox 9"/>
-          <p:cNvSpPr txBox="1"/>
-          <p:nvPr/>
-        </p:nvSpPr>
-        <p:spPr>
-          <a:xfrm>
-            <a:off x="822960" y="4251960"/>
-            <a:ext cx="10058400" cy="365760"/>
-          </a:xfrm>
-          <a:prstGeom prst="rect">
-            <a:avLst/>
-          </a:prstGeom>
-          <a:noFill/>
-        </p:spPr>
-        <p:txBody>
-          <a:bodyPr wrap="square">
-            <a:spAutoFit/>
-          </a:bodyPr>
-          <a:lstStyle/>
-          <a:p>
-            <a:pPr algn="l">
-              <a:defRPr sz="1600" b="0">
-                <a:solidFill>
-                  <a:srgbClr val="F8FAFC"/>
-                </a:solidFill>
-              </a:defRPr>
-            </a:pPr>
-            <a:r>
-              <a:t>Web Speech API · demo script · this deck</a:t>
-            </a:r>
-          </a:p>
-        </p:txBody>
-      </p:sp>
-    </p:spTree>
-  </p:cSld>
-  <p:clrMapOvr>
-    <a:masterClrMapping/>
-  </p:clrMapOvr>
-</p:sld>
-</file>
-
-<file path=ppt/slides/slide14.xml><?xml version="1.0" encoding="utf-8"?>
-<p:sld xmlns:a="http://schemas.openxmlformats.org/drawingml/2006/main" xmlns:p="http://schemas.openxmlformats.org/presentationml/2006/main" xmlns:r="http://schemas.openxmlformats.org/officeDocument/2006/relationships">
-  <p:cSld>
-    <p:bg>
-      <p:bgPr>
-        <a:solidFill>
-          <a:srgbClr val="0F172A"/>
-        </a:solidFill>
-        <a:effectLst/>
-      </p:bgPr>
-    </p:bg>
-    <p:spTree>
-      <p:nvGrpSpPr>
-        <p:cNvPr id="1" name=""/>
-        <p:cNvGrpSpPr/>
-        <p:nvPr/>
-      </p:nvGrpSpPr>
-      <p:grpSpPr/>
-      <p:sp>
-        <p:nvSpPr>
-          <p:cNvPr id="2" name="TextBox 1"/>
-          <p:cNvSpPr txBox="1"/>
-          <p:nvPr/>
-        </p:nvSpPr>
-        <p:spPr>
-          <a:xfrm>
-            <a:off x="822960" y="2011680"/>
             <a:ext cx="10515600" cy="914400"/>
           </a:xfrm>
           <a:prstGeom prst="rect">
@@ -4838,7 +4628,7 @@
         </p:nvSpPr>
         <p:spPr>
           <a:xfrm>
-            <a:off x="822960" y="3017520"/>
+            <a:off x="822960" y="2834640"/>
             <a:ext cx="10515600" cy="914400"/>
           </a:xfrm>
           <a:prstGeom prst="rect">
@@ -4873,7 +4663,42 @@
         </p:nvSpPr>
         <p:spPr>
           <a:xfrm>
-            <a:off x="822960" y="4389120"/>
+            <a:off x="822960" y="3840480"/>
+            <a:ext cx="10515600" cy="548640"/>
+          </a:xfrm>
+          <a:prstGeom prst="rect">
+            <a:avLst/>
+          </a:prstGeom>
+          <a:noFill/>
+        </p:spPr>
+        <p:txBody>
+          <a:bodyPr wrap="square">
+            <a:spAutoFit/>
+          </a:bodyPr>
+          <a:lstStyle/>
+          <a:p>
+            <a:pPr algn="ctr">
+              <a:defRPr sz="1600" b="0">
+                <a:solidFill>
+                  <a:srgbClr val="22C55E"/>
+                </a:solidFill>
+              </a:defRPr>
+            </a:pPr>
+            <a:r>
+              <a:t>Mining track  ·  Worker safety  ·  Smart ventilation</a:t>
+            </a:r>
+          </a:p>
+        </p:txBody>
+      </p:sp>
+      <p:sp>
+        <p:nvSpPr>
+          <p:cNvPr id="5" name="TextBox 4"/>
+          <p:cNvSpPr txBox="1"/>
+          <p:nvPr/>
+        </p:nvSpPr>
+        <p:spPr>
+          <a:xfrm>
+            <a:off x="822960" y="4754880"/>
             <a:ext cx="10515600" cy="548640"/>
           </a:xfrm>
           <a:prstGeom prst="rect">
@@ -4902,13 +4727,13 @@
       </p:sp>
       <p:sp>
         <p:nvSpPr>
-          <p:cNvPr id="5" name="TextBox 4"/>
-          <p:cNvSpPr txBox="1"/>
-          <p:nvPr/>
-        </p:nvSpPr>
-        <p:spPr>
-          <a:xfrm>
-            <a:off x="822960" y="5303520"/>
+          <p:cNvPr id="6" name="TextBox 5"/>
+          <p:cNvSpPr txBox="1"/>
+          <p:nvPr/>
+        </p:nvSpPr>
+        <p:spPr>
+          <a:xfrm>
+            <a:off x="822960" y="5486400"/>
             <a:ext cx="10515600" cy="457200"/>
           </a:xfrm>
           <a:prstGeom prst="rect">
@@ -5012,7 +4837,42 @@
         </p:nvSpPr>
         <p:spPr>
           <a:xfrm>
-            <a:off x="777240" y="411480"/>
+            <a:off x="777240" y="320040"/>
+            <a:ext cx="10515600" cy="320040"/>
+          </a:xfrm>
+          <a:prstGeom prst="rect">
+            <a:avLst/>
+          </a:prstGeom>
+          <a:noFill/>
+        </p:spPr>
+        <p:txBody>
+          <a:bodyPr wrap="square">
+            <a:spAutoFit/>
+          </a:bodyPr>
+          <a:lstStyle/>
+          <a:p>
+            <a:pPr algn="l">
+              <a:defRPr sz="1100" b="1">
+                <a:solidFill>
+                  <a:srgbClr val="38BDF8"/>
+                </a:solidFill>
+              </a:defRPr>
+            </a:pPr>
+            <a:r>
+              <a:t>JUDGING CRITERION 1 — Problem relevance &amp; track alignment</a:t>
+            </a:r>
+          </a:p>
+        </p:txBody>
+      </p:sp>
+      <p:sp>
+        <p:nvSpPr>
+          <p:cNvPr id="4" name="TextBox 3"/>
+          <p:cNvSpPr txBox="1"/>
+          <p:nvPr/>
+        </p:nvSpPr>
+        <p:spPr>
+          <a:xfrm>
+            <a:off x="777240" y="594360"/>
             <a:ext cx="10515600" cy="640080"/>
           </a:xfrm>
           <a:prstGeom prst="rect">
@@ -5041,13 +4901,13 @@
       </p:sp>
       <p:sp>
         <p:nvSpPr>
-          <p:cNvPr id="4" name="TextBox 3"/>
-          <p:cNvSpPr txBox="1"/>
-          <p:nvPr/>
-        </p:nvSpPr>
-        <p:spPr>
-          <a:xfrm>
-            <a:off x="777240" y="960120"/>
+          <p:cNvPr id="5" name="TextBox 4"/>
+          <p:cNvSpPr txBox="1"/>
+          <p:nvPr/>
+        </p:nvSpPr>
+        <p:spPr>
+          <a:xfrm>
+            <a:off x="777240" y="1143000"/>
             <a:ext cx="10515600" cy="457200"/>
           </a:xfrm>
           <a:prstGeom prst="rect">
@@ -5069,21 +4929,21 @@
               </a:defRPr>
             </a:pPr>
             <a:r>
-              <a:t>Why underground safety fails when it matters most</a:t>
-            </a:r>
-          </a:p>
-        </p:txBody>
-      </p:sp>
-      <p:sp>
-        <p:nvSpPr>
-          <p:cNvPr id="5" name="TextBox 4"/>
-          <p:cNvSpPr txBox="1"/>
-          <p:nvPr/>
-        </p:nvSpPr>
-        <p:spPr>
-          <a:xfrm>
-            <a:off x="822960" y="1554480"/>
-            <a:ext cx="10241280" cy="4114800"/>
+              <a:t>Specific, real, and directly aligned to the Mining track</a:t>
+            </a:r>
+          </a:p>
+        </p:txBody>
+      </p:sp>
+      <p:sp>
+        <p:nvSpPr>
+          <p:cNvPr id="6" name="TextBox 5"/>
+          <p:cNvSpPr txBox="1"/>
+          <p:nvPr/>
+        </p:nvSpPr>
+        <p:spPr>
+          <a:xfrm>
+            <a:off x="822960" y="1691640"/>
+            <a:ext cx="10241280" cy="3474720"/>
           </a:xfrm>
           <a:prstGeom prst="rect">
             <a:avLst/>
@@ -5100,7 +4960,7 @@
               <a:spcAft>
                 <a:spcPts val="800"/>
               </a:spcAft>
-              <a:defRPr sz="2000">
+              <a:defRPr sz="1900">
                 <a:solidFill>
                   <a:srgbClr val="F8FAFC"/>
                 </a:solidFill>
@@ -5115,14 +4975,14 @@
               <a:spcAft>
                 <a:spcPts val="800"/>
               </a:spcAft>
-              <a:defRPr sz="2000">
+              <a:defRPr sz="1900">
                 <a:solidFill>
                   <a:srgbClr val="F8FAFC"/>
                 </a:solidFill>
               </a:defRPr>
             </a:pPr>
             <a:r>
-              <a:t>Legacy leaky-feeder cables die the moment a roof fall cuts the line</a:t>
+              <a:t>Sensors report a gas number — they do not tell crews what to do next</a:t>
             </a:r>
           </a:p>
           <a:p>
@@ -5130,14 +4990,14 @@
               <a:spcAft>
                 <a:spcPts val="800"/>
               </a:spcAft>
-              <a:defRPr sz="2000">
+              <a:defRPr sz="1900">
                 <a:solidFill>
                   <a:srgbClr val="F8FAFC"/>
                 </a:solidFill>
               </a:defRPr>
             </a:pPr>
             <a:r>
-              <a:t>Sensors report a gas number — they don't tell crews what to do next</a:t>
+              <a:t>Cloud systems go dark during roof falls, exactly when they are needed most</a:t>
             </a:r>
           </a:p>
           <a:p>
@@ -5145,64 +5005,117 @@
               <a:spcAft>
                 <a:spcPts val="800"/>
               </a:spcAft>
-              <a:defRPr sz="2000">
+              <a:defRPr sz="1900">
                 <a:solidFill>
                   <a:srgbClr val="F8FAFC"/>
                 </a:solidFill>
               </a:defRPr>
             </a:pPr>
             <a:r>
-              <a:t>Cloud-dependent systems go dark exactly during an incident</a:t>
-            </a:r>
-          </a:p>
+              <a:t>Alarms fire AFTER danger — not while methane is still climbing toward the limit</a:t>
+            </a:r>
+          </a:p>
+        </p:txBody>
+      </p:sp>
+      <p:sp>
+        <p:nvSpPr>
+          <p:cNvPr id="7" name="TextBox 6"/>
+          <p:cNvSpPr txBox="1"/>
+          <p:nvPr/>
+        </p:nvSpPr>
+        <p:spPr>
+          <a:xfrm>
+            <a:off x="822960" y="4572000"/>
+            <a:ext cx="10515600" cy="365760"/>
+          </a:xfrm>
+          <a:prstGeom prst="rect">
+            <a:avLst/>
+          </a:prstGeom>
+          <a:noFill/>
+        </p:spPr>
+        <p:txBody>
+          <a:bodyPr wrap="square">
+            <a:spAutoFit/>
+          </a:bodyPr>
+          <a:lstStyle/>
+          <a:p>
+            <a:pPr algn="l">
+              <a:defRPr sz="1600" b="1">
+                <a:solidFill>
+                  <a:srgbClr val="F59E0B"/>
+                </a:solidFill>
+              </a:defRPr>
+            </a:pPr>
+            <a:r>
+              <a:t>Track alignment</a:t>
+            </a:r>
+          </a:p>
+        </p:txBody>
+      </p:sp>
+      <p:sp>
+        <p:nvSpPr>
+          <p:cNvPr id="8" name="TextBox 7"/>
+          <p:cNvSpPr txBox="1"/>
+          <p:nvPr/>
+        </p:nvSpPr>
+        <p:spPr>
+          <a:xfrm>
+            <a:off x="822960" y="4937760"/>
+            <a:ext cx="10241280" cy="1371600"/>
+          </a:xfrm>
+          <a:prstGeom prst="rect">
+            <a:avLst/>
+          </a:prstGeom>
+          <a:noFill/>
+        </p:spPr>
+        <p:txBody>
+          <a:bodyPr wrap="square">
+            <a:spAutoFit/>
+          </a:bodyPr>
+          <a:lstStyle/>
           <a:p>
             <a:pPr>
               <a:spcAft>
                 <a:spcPts val="800"/>
               </a:spcAft>
-              <a:defRPr sz="2000">
-                <a:solidFill>
-                  <a:srgbClr val="F8FAFC"/>
-                </a:solidFill>
-              </a:defRPr>
-            </a:pPr>
-            <a:r>
-              <a:t>Alarms fire AFTER danger — not while methane is still climbing</a:t>
-            </a:r>
-          </a:p>
-        </p:txBody>
-      </p:sp>
-      <p:sp>
-        <p:nvSpPr>
-          <p:cNvPr id="6" name="TextBox 5"/>
-          <p:cNvSpPr txBox="1"/>
-          <p:nvPr/>
-        </p:nvSpPr>
-        <p:spPr>
-          <a:xfrm>
-            <a:off x="822960" y="5669280"/>
-            <a:ext cx="10058400" cy="457200"/>
-          </a:xfrm>
-          <a:prstGeom prst="rect">
-            <a:avLst/>
-          </a:prstGeom>
-          <a:noFill/>
-        </p:spPr>
-        <p:txBody>
-          <a:bodyPr wrap="square">
-            <a:spAutoFit/>
-          </a:bodyPr>
-          <a:lstStyle/>
-          <a:p>
-            <a:pPr algn="l">
-              <a:defRPr sz="1300" b="0">
+              <a:defRPr sz="1500">
                 <a:solidFill>
                   <a:srgbClr val="94A3B8"/>
                 </a:solidFill>
               </a:defRPr>
             </a:pPr>
             <a:r>
-              <a:t>Who suffers: miners, shift supervisors, emergency response teams</a:t>
+              <a:t>MINING — gas monitoring, ventilation, Reg 854 compliance underground</a:t>
+            </a:r>
+          </a:p>
+          <a:p>
+            <a:pPr>
+              <a:spcAft>
+                <a:spcPts val="800"/>
+              </a:spcAft>
+              <a:defRPr sz="1500">
+                <a:solidFill>
+                  <a:srgbClr val="94A3B8"/>
+                </a:solidFill>
+              </a:defRPr>
+            </a:pPr>
+            <a:r>
+              <a:t>HEALTH — protects miners with early warning and cited evacuation procedures</a:t>
+            </a:r>
+          </a:p>
+          <a:p>
+            <a:pPr>
+              <a:spcAft>
+                <a:spcPts val="800"/>
+              </a:spcAft>
+              <a:defRPr sz="1500">
+                <a:solidFill>
+                  <a:srgbClr val="94A3B8"/>
+                </a:solidFill>
+              </a:defRPr>
+            </a:pPr>
+            <a:r>
+              <a:t>SUSTAINABILITY — smart fan control saves power; only ramps when gas builds</a:t>
             </a:r>
           </a:p>
         </p:txBody>
@@ -5284,7 +5197,42 @@
         </p:nvSpPr>
         <p:spPr>
           <a:xfrm>
-            <a:off x="777240" y="411480"/>
+            <a:off x="777240" y="320040"/>
+            <a:ext cx="10515600" cy="320040"/>
+          </a:xfrm>
+          <a:prstGeom prst="rect">
+            <a:avLst/>
+          </a:prstGeom>
+          <a:noFill/>
+        </p:spPr>
+        <p:txBody>
+          <a:bodyPr wrap="square">
+            <a:spAutoFit/>
+          </a:bodyPr>
+          <a:lstStyle/>
+          <a:p>
+            <a:pPr algn="l">
+              <a:defRPr sz="1100" b="1">
+                <a:solidFill>
+                  <a:srgbClr val="38BDF8"/>
+                </a:solidFill>
+              </a:defRPr>
+            </a:pPr>
+            <a:r>
+              <a:t>JUDGING CRITERION 2 — Solution design &amp; practicality</a:t>
+            </a:r>
+          </a:p>
+        </p:txBody>
+      </p:sp>
+      <p:sp>
+        <p:nvSpPr>
+          <p:cNvPr id="4" name="TextBox 3"/>
+          <p:cNvSpPr txBox="1"/>
+          <p:nvPr/>
+        </p:nvSpPr>
+        <p:spPr>
+          <a:xfrm>
+            <a:off x="777240" y="594360"/>
             <a:ext cx="10515600" cy="640080"/>
           </a:xfrm>
           <a:prstGeom prst="rect">
@@ -5306,20 +5254,20 @@
               </a:defRPr>
             </a:pPr>
             <a:r>
-              <a:t>Why Now?</a:t>
-            </a:r>
-          </a:p>
-        </p:txBody>
-      </p:sp>
-      <p:sp>
-        <p:nvSpPr>
-          <p:cNvPr id="4" name="TextBox 3"/>
-          <p:cNvSpPr txBox="1"/>
-          <p:nvPr/>
-        </p:nvSpPr>
-        <p:spPr>
-          <a:xfrm>
-            <a:off x="777240" y="960120"/>
+              <a:t>Our Solution</a:t>
+            </a:r>
+          </a:p>
+        </p:txBody>
+      </p:sp>
+      <p:sp>
+        <p:nvSpPr>
+          <p:cNvPr id="5" name="TextBox 4"/>
+          <p:cNvSpPr txBox="1"/>
+          <p:nvPr/>
+        </p:nvSpPr>
+        <p:spPr>
+          <a:xfrm>
+            <a:off x="777240" y="1143000"/>
             <a:ext cx="10515600" cy="457200"/>
           </a:xfrm>
           <a:prstGeom prst="rect">
@@ -5341,21 +5289,56 @@
               </a:defRPr>
             </a:pPr>
             <a:r>
-              <a:t>The industry is moving — but the safety gap remains</a:t>
-            </a:r>
-          </a:p>
-        </p:txBody>
-      </p:sp>
-      <p:sp>
-        <p:nvSpPr>
-          <p:cNvPr id="5" name="TextBox 4"/>
-          <p:cNvSpPr txBox="1"/>
-          <p:nvPr/>
-        </p:nvSpPr>
-        <p:spPr>
-          <a:xfrm>
-            <a:off x="822960" y="1554480"/>
-            <a:ext cx="5029200" cy="4114800"/>
+              <a:t>Designed for real mine operators, supervisors, and underground crews</a:t>
+            </a:r>
+          </a:p>
+        </p:txBody>
+      </p:sp>
+      <p:sp>
+        <p:nvSpPr>
+          <p:cNvPr id="6" name="TextBox 5"/>
+          <p:cNvSpPr txBox="1"/>
+          <p:nvPr/>
+        </p:nvSpPr>
+        <p:spPr>
+          <a:xfrm>
+            <a:off x="822960" y="1691640"/>
+            <a:ext cx="10515600" cy="914400"/>
+          </a:xfrm>
+          <a:prstGeom prst="rect">
+            <a:avLst/>
+          </a:prstGeom>
+          <a:noFill/>
+        </p:spPr>
+        <p:txBody>
+          <a:bodyPr wrap="square">
+            <a:spAutoFit/>
+          </a:bodyPr>
+          <a:lstStyle/>
+          <a:p>
+            <a:pPr algn="l">
+              <a:defRPr sz="2100" b="0">
+                <a:solidFill>
+                  <a:srgbClr val="F8FAFC"/>
+                </a:solidFill>
+              </a:defRPr>
+            </a:pPr>
+            <a:r>
+              <a:t>MineGuard Edge runs offline at every zone, detects dangerous gas trends early, ramps ventilation automatically, and speaks the exact Reg 854 procedure — with citations.</a:t>
+            </a:r>
+          </a:p>
+        </p:txBody>
+      </p:sp>
+      <p:sp>
+        <p:nvSpPr>
+          <p:cNvPr id="7" name="TextBox 6"/>
+          <p:cNvSpPr txBox="1"/>
+          <p:nvPr/>
+        </p:nvSpPr>
+        <p:spPr>
+          <a:xfrm>
+            <a:off x="822960" y="2834640"/>
+            <a:ext cx="5029200" cy="3200400"/>
           </a:xfrm>
           <a:prstGeom prst="rect">
             <a:avLst/>
@@ -5372,14 +5355,14 @@
               <a:spcAft>
                 <a:spcPts val="800"/>
               </a:spcAft>
-              <a:defRPr sz="1700">
+              <a:defRPr sz="1600">
                 <a:solidFill>
                   <a:srgbClr val="F8FAFC"/>
                 </a:solidFill>
               </a:defRPr>
             </a:pPr>
             <a:r>
-              <a:t>Modern mines deploy wireless mesh (Becker, Maestro, Glencore)</a:t>
+              <a:t>Who uses it: shift supervisors, safety officers, underground crews</a:t>
             </a:r>
           </a:p>
           <a:p>
@@ -5387,14 +5370,14 @@
               <a:spcAft>
                 <a:spcPts val="800"/>
               </a:spcAft>
-              <a:defRPr sz="1700">
+              <a:defRPr sz="1600">
                 <a:solidFill>
                   <a:srgbClr val="F8FAFC"/>
                 </a:solidFill>
               </a:defRPr>
             </a:pPr>
             <a:r>
-              <a:t>MQTT pub/sub is standard for industrial sensors</a:t>
+              <a:t>Where it runs: edge box per zone — no surface server required</a:t>
             </a:r>
           </a:p>
           <a:p>
@@ -5402,14 +5385,14 @@
               <a:spcAft>
                 <a:spcPts val="800"/>
               </a:spcAft>
-              <a:defRPr sz="1700">
+              <a:defRPr sz="1600">
                 <a:solidFill>
                   <a:srgbClr val="F8FAFC"/>
                 </a:solidFill>
               </a:defRPr>
             </a:pPr>
             <a:r>
-              <a:t>Reg 854 mandates specific gas-response procedures</a:t>
+              <a:t>When it acts: trend detected → fan ramps → alert + voice procedure</a:t>
             </a:r>
           </a:p>
           <a:p>
@@ -5417,28 +5400,28 @@
               <a:spcAft>
                 <a:spcPts val="800"/>
               </a:spcAft>
-              <a:defRPr sz="1700">
+              <a:defRPr sz="1600">
                 <a:solidFill>
                   <a:srgbClr val="F8FAFC"/>
                 </a:solidFill>
               </a:defRPr>
             </a:pPr>
             <a:r>
-              <a:t>Edge computing makes offline intelligence possible today</a:t>
-            </a:r>
-          </a:p>
-        </p:txBody>
-      </p:sp>
-      <p:sp>
-        <p:nvSpPr>
-          <p:cNvPr id="6" name="TextBox 5"/>
-          <p:cNvSpPr txBox="1"/>
-          <p:nvPr/>
-        </p:nvSpPr>
-        <p:spPr>
-          <a:xfrm>
-            <a:off x="6400800" y="1737360"/>
-            <a:ext cx="5029200" cy="4114800"/>
+              <a:t>Why it fits: same MQTT + mesh architecture Becker / Maestro / Glencore use</a:t>
+            </a:r>
+          </a:p>
+        </p:txBody>
+      </p:sp>
+      <p:sp>
+        <p:nvSpPr>
+          <p:cNvPr id="8" name="TextBox 7"/>
+          <p:cNvSpPr txBox="1"/>
+          <p:nvPr/>
+        </p:nvSpPr>
+        <p:spPr>
+          <a:xfrm>
+            <a:off x="6400800" y="2834640"/>
+            <a:ext cx="5029200" cy="3200400"/>
           </a:xfrm>
           <a:prstGeom prst="rect">
             <a:avLst/>
@@ -5452,28 +5435,31 @@
           <a:lstStyle/>
           <a:p>
             <a:pPr algn="l">
-              <a:defRPr sz="1800" b="0">
+              <a:defRPr sz="1500" b="0">
                 <a:solidFill>
                   <a:srgbClr val="F59E0B"/>
                 </a:solidFill>
               </a:defRPr>
             </a:pPr>
             <a:r>
-              <a:t>The gap:</a:t>
+              <a:t>Practical design choices:</a:t>
             </a:r>
             <a:br/>
             <a:br/>
             <a:r>
-              <a:t>Mesh moves data.</a:t>
+              <a:t>• Trend before threshold → orderly withdrawal</a:t>
             </a:r>
             <a:br/>
             <a:r>
-              <a:t>Sensors measure gas.</a:t>
+              <a:t>• Ventilation only (never enrich O₂ — explosion risk)</a:t>
             </a:r>
             <a:br/>
+            <a:r>
+              <a:t>• Template answers over cloud LLM → instant, reliable</a:t>
+            </a:r>
             <a:br/>
             <a:r>
-              <a:t>Nothing turns a rising reading into an immediate, cited, spoken safety action — offline, at the edge, per zone.</a:t>
+              <a:t>• Internal-timer fallback if MQTT is unavailable</a:t>
             </a:r>
           </a:p>
         </p:txBody>
@@ -5577,7 +5563,7 @@
               </a:defRPr>
             </a:pPr>
             <a:r>
-              <a:t>Our Solution</a:t>
+              <a:t>How It Works</a:t>
             </a:r>
           </a:p>
         </p:txBody>
@@ -5612,7 +5598,7 @@
               </a:defRPr>
             </a:pPr>
             <a:r>
-              <a:t>One sentence</a:t>
+              <a:t>All local — no external calls anywhere</a:t>
             </a:r>
           </a:p>
         </p:txBody>
@@ -5625,29 +5611,66 @@
         </p:nvSpPr>
         <p:spPr>
           <a:xfrm>
-            <a:off x="822960" y="1645920"/>
-            <a:ext cx="10515600" cy="1097280"/>
-          </a:xfrm>
-          <a:prstGeom prst="rect">
-            <a:avLst/>
-          </a:prstGeom>
-          <a:noFill/>
-        </p:spPr>
-        <p:txBody>
-          <a:bodyPr wrap="square">
-            <a:spAutoFit/>
-          </a:bodyPr>
-          <a:lstStyle/>
-          <a:p>
-            <a:pPr algn="l">
-              <a:defRPr sz="2200" b="0">
+            <a:off x="822960" y="1554480"/>
+            <a:ext cx="6583680" cy="4389120"/>
+          </a:xfrm>
+          <a:prstGeom prst="rect">
+            <a:avLst/>
+          </a:prstGeom>
+          <a:noFill/>
+        </p:spPr>
+        <p:txBody>
+          <a:bodyPr wrap="none">
+            <a:spAutoFit/>
+          </a:bodyPr>
+          <a:lstStyle/>
+          <a:p>
+            <a:pPr>
+              <a:defRPr sz="1400">
                 <a:solidFill>
                   <a:srgbClr val="F8FAFC"/>
                 </a:solidFill>
-              </a:defRPr>
-            </a:pPr>
-            <a:r>
-              <a:t>MineGuard Edge runs offline at every zone, detects dangerous gas trends early, ramps ventilation automatically, and speaks the exact Reg 854 procedure — with citations.</a:t>
+                <a:latin typeface="Courier New"/>
+              </a:defRPr>
+            </a:pPr>
+            <a:r>
+              <a:t>ZONE SENSORS (×4)          EDGE BACKEND</a:t>
+            </a:r>
+            <a:br/>
+            <a:r>
+              <a:t>  methane, CO, temp   →    Mosquitto MQTT (mesh stand-in)</a:t>
+            </a:r>
+            <a:br/>
+            <a:r>
+              <a:t>  airflow, fan speed         ↓</a:t>
+            </a:r>
+            <a:br/>
+            <a:r>
+              <a:t>                             Trend detector + fan control loop</a:t>
+            </a:r>
+            <a:br/>
+            <a:r>
+              <a:t>                             ↓</a:t>
+            </a:r>
+            <a:br/>
+            <a:r>
+              <a:t>                             FastAPI  /zones  /alert  /ask</a:t>
+            </a:r>
+            <a:br/>
+            <a:r>
+              <a:t>                             ↓</a:t>
+            </a:r>
+            <a:br/>
+            <a:r>
+              <a:t>                             Reg 854 docs + cited answers</a:t>
+            </a:r>
+            <a:br/>
+            <a:r>
+              <a:t>                             ↓</a:t>
+            </a:r>
+            <a:br/>
+            <a:r>
+              <a:t>                             Web UI + offline voice alert</a:t>
             </a:r>
           </a:p>
         </p:txBody>
@@ -5660,8 +5683,8 @@
         </p:nvSpPr>
         <p:spPr>
           <a:xfrm>
-            <a:off x="822960" y="3017520"/>
-            <a:ext cx="10241280" cy="2743200"/>
+            <a:off x="7680960" y="1737360"/>
+            <a:ext cx="3840480" cy="4114800"/>
           </a:xfrm>
           <a:prstGeom prst="rect">
             <a:avLst/>
@@ -5678,14 +5701,14 @@
               <a:spcAft>
                 <a:spcPts val="800"/>
               </a:spcAft>
-              <a:defRPr sz="1800">
-                <a:solidFill>
-                  <a:srgbClr val="F8FAFC"/>
-                </a:solidFill>
-              </a:defRPr>
-            </a:pPr>
-            <a:r>
-              <a:t>Trend detection — warn BEFORE the threshold, not after</a:t>
+              <a:defRPr sz="1500">
+                <a:solidFill>
+                  <a:srgbClr val="94A3B8"/>
+                </a:solidFill>
+              </a:defRPr>
+            </a:pPr>
+            <a:r>
+              <a:t>Production: wireless self-healing mesh</a:t>
             </a:r>
           </a:p>
           <a:p>
@@ -5693,14 +5716,14 @@
               <a:spcAft>
                 <a:spcPts val="800"/>
               </a:spcAft>
-              <a:defRPr sz="1800">
-                <a:solidFill>
-                  <a:srgbClr val="F8FAFC"/>
-                </a:solidFill>
-              </a:defRPr>
-            </a:pPr>
-            <a:r>
-              <a:t>Automated ventilation control — fans ramp to dilute gas (never enrich O₂)</a:t>
+              <a:defRPr sz="1500">
+                <a:solidFill>
+                  <a:srgbClr val="94A3B8"/>
+                </a:solidFill>
+              </a:defRPr>
+            </a:pPr>
+            <a:r>
+              <a:t>Demo: simulated zones on one laptop</a:t>
             </a:r>
           </a:p>
           <a:p>
@@ -5708,29 +5731,14 @@
               <a:spcAft>
                 <a:spcPts val="800"/>
               </a:spcAft>
-              <a:defRPr sz="1800">
-                <a:solidFill>
-                  <a:srgbClr val="F8FAFC"/>
-                </a:solidFill>
-              </a:defRPr>
-            </a:pPr>
-            <a:r>
-              <a:t>Reg 854-grounded answers — auditable, not a guess</a:t>
-            </a:r>
-          </a:p>
-          <a:p>
-            <a:pPr>
-              <a:spcAft>
-                <a:spcPts val="800"/>
-              </a:spcAft>
-              <a:defRPr sz="1800">
-                <a:solidFill>
-                  <a:srgbClr val="F8FAFC"/>
-                </a:solidFill>
-              </a:defRPr>
-            </a:pPr>
-            <a:r>
-              <a:t>Voice + visual alerts — crew hears the procedure underground</a:t>
+              <a:defRPr sz="1500">
+                <a:solidFill>
+                  <a:srgbClr val="94A3B8"/>
+                </a:solidFill>
+              </a:defRPr>
+            </a:pPr>
+            <a:r>
+              <a:t>Green → Yellow → Red → ventilating → Green cycle</a:t>
             </a:r>
           </a:p>
         </p:txBody>
@@ -5834,7 +5842,7 @@
               </a:defRPr>
             </a:pPr>
             <a:r>
-              <a:t>How It Works</a:t>
+              <a:t>Key Innovation: TREND, Not Threshold</a:t>
             </a:r>
           </a:p>
         </p:txBody>
@@ -5869,7 +5877,7 @@
               </a:defRPr>
             </a:pPr>
             <a:r>
-              <a:t>All local. No external calls.</a:t>
+              <a:t>Early warning — crew leaves before it's an emergency</a:t>
             </a:r>
           </a:p>
         </p:txBody>
@@ -5883,65 +5891,28 @@
         <p:spPr>
           <a:xfrm>
             <a:off x="822960" y="1554480"/>
-            <a:ext cx="6858000" cy="4389120"/>
-          </a:xfrm>
-          <a:prstGeom prst="rect">
-            <a:avLst/>
-          </a:prstGeom>
-          <a:noFill/>
-        </p:spPr>
-        <p:txBody>
-          <a:bodyPr wrap="none">
-            <a:spAutoFit/>
-          </a:bodyPr>
-          <a:lstStyle/>
-          <a:p>
-            <a:pPr>
-              <a:defRPr sz="1400">
-                <a:solidFill>
-                  <a:srgbClr val="F8FAFC"/>
-                </a:solidFill>
-                <a:latin typeface="Courier New"/>
-              </a:defRPr>
-            </a:pPr>
-            <a:r>
-              <a:t>ZONE SENSORS (×4)          EDGE BACKEND (laptop / edge box)</a:t>
-            </a:r>
-            <a:br/>
-            <a:r>
-              <a:t>  methane, CO, temp   →    MQTT broker (Mosquitto)</a:t>
-            </a:r>
-            <a:br/>
-            <a:r>
-              <a:t>  airflow, fan speed         ↓</a:t>
-            </a:r>
-            <a:br/>
-            <a:r>
-              <a:t>                             Trend detector + fan loop</a:t>
-            </a:r>
-            <a:br/>
-            <a:r>
-              <a:t>                             ↓</a:t>
-            </a:r>
-            <a:br/>
-            <a:r>
-              <a:t>                             FastAPI  /zones  /alert  /ask</a:t>
-            </a:r>
-            <a:br/>
-            <a:r>
-              <a:t>                             ↓</a:t>
-            </a:r>
-            <a:br/>
-            <a:r>
-              <a:t>                             Reg 854 docs + template answers</a:t>
-            </a:r>
-            <a:br/>
-            <a:r>
-              <a:t>                             ↓</a:t>
-            </a:r>
-            <a:br/>
-            <a:r>
-              <a:t>                             Web UI + voice alert (offline)</a:t>
+            <a:ext cx="5029200" cy="365760"/>
+          </a:xfrm>
+          <a:prstGeom prst="rect">
+            <a:avLst/>
+          </a:prstGeom>
+          <a:noFill/>
+        </p:spPr>
+        <p:txBody>
+          <a:bodyPr wrap="square">
+            <a:spAutoFit/>
+          </a:bodyPr>
+          <a:lstStyle/>
+          <a:p>
+            <a:pPr algn="l">
+              <a:defRPr sz="1700" b="1">
+                <a:solidFill>
+                  <a:srgbClr val="EF4444"/>
+                </a:solidFill>
+              </a:defRPr>
+            </a:pPr>
+            <a:r>
+              <a:t>Traditional systems</a:t>
             </a:r>
           </a:p>
         </p:txBody>
@@ -5954,8 +5925,8 @@
         </p:nvSpPr>
         <p:spPr>
           <a:xfrm>
-            <a:off x="7863840" y="1737360"/>
-            <a:ext cx="3657600" cy="4114800"/>
+            <a:off x="822960" y="1965960"/>
+            <a:ext cx="5029200" cy="1645920"/>
           </a:xfrm>
           <a:prstGeom prst="rect">
             <a:avLst/>
@@ -5972,14 +5943,14 @@
               <a:spcAft>
                 <a:spcPts val="800"/>
               </a:spcAft>
-              <a:defRPr sz="1500">
-                <a:solidFill>
-                  <a:srgbClr val="94A3B8"/>
-                </a:solidFill>
-              </a:defRPr>
-            </a:pPr>
-            <a:r>
-              <a:t>Production: wireless self-healing mesh</a:t>
+              <a:defRPr sz="1600">
+                <a:solidFill>
+                  <a:srgbClr val="F8FAFC"/>
+                </a:solidFill>
+              </a:defRPr>
+            </a:pPr>
+            <a:r>
+              <a:t>Alarm only at 1.5% methane</a:t>
             </a:r>
           </a:p>
           <a:p>
@@ -5987,29 +5958,152 @@
               <a:spcAft>
                 <a:spcPts val="800"/>
               </a:spcAft>
-              <a:defRPr sz="1500">
-                <a:solidFill>
-                  <a:srgbClr val="94A3B8"/>
-                </a:solidFill>
-              </a:defRPr>
-            </a:pPr>
-            <a:r>
-              <a:t>Demo: local MQTT on localhost</a:t>
-            </a:r>
-          </a:p>
+              <a:defRPr sz="1600">
+                <a:solidFill>
+                  <a:srgbClr val="F8FAFC"/>
+                </a:solidFill>
+              </a:defRPr>
+            </a:pPr>
+            <a:r>
+              <a:t>Reactive — too late for orderly exit</a:t>
+            </a:r>
+          </a:p>
+        </p:txBody>
+      </p:sp>
+      <p:sp>
+        <p:nvSpPr>
+          <p:cNvPr id="7" name="TextBox 6"/>
+          <p:cNvSpPr txBox="1"/>
+          <p:nvPr/>
+        </p:nvSpPr>
+        <p:spPr>
+          <a:xfrm>
+            <a:off x="6400800" y="1554480"/>
+            <a:ext cx="5029200" cy="365760"/>
+          </a:xfrm>
+          <a:prstGeom prst="rect">
+            <a:avLst/>
+          </a:prstGeom>
+          <a:noFill/>
+        </p:spPr>
+        <p:txBody>
+          <a:bodyPr wrap="square">
+            <a:spAutoFit/>
+          </a:bodyPr>
+          <a:lstStyle/>
+          <a:p>
+            <a:pPr algn="l">
+              <a:defRPr sz="1700" b="1">
+                <a:solidFill>
+                  <a:srgbClr val="22C55E"/>
+                </a:solidFill>
+              </a:defRPr>
+            </a:pPr>
+            <a:r>
+              <a:t>MineGuard Edge</a:t>
+            </a:r>
+          </a:p>
+        </p:txBody>
+      </p:sp>
+      <p:sp>
+        <p:nvSpPr>
+          <p:cNvPr id="8" name="TextBox 7"/>
+          <p:cNvSpPr txBox="1"/>
+          <p:nvPr/>
+        </p:nvSpPr>
+        <p:spPr>
+          <a:xfrm>
+            <a:off x="6400800" y="1965960"/>
+            <a:ext cx="5029200" cy="2011680"/>
+          </a:xfrm>
+          <a:prstGeom prst="rect">
+            <a:avLst/>
+          </a:prstGeom>
+          <a:noFill/>
+        </p:spPr>
+        <p:txBody>
+          <a:bodyPr wrap="square">
+            <a:spAutoFit/>
+          </a:bodyPr>
+          <a:lstStyle/>
           <a:p>
             <a:pPr>
               <a:spcAft>
                 <a:spcPts val="800"/>
               </a:spcAft>
-              <a:defRPr sz="1500">
-                <a:solidFill>
-                  <a:srgbClr val="94A3B8"/>
-                </a:solidFill>
-              </a:defRPr>
-            </a:pPr>
-            <a:r>
-              <a:t>Fallback: internal timer (no broker needed)</a:t>
+              <a:defRPr sz="1600">
+                <a:solidFill>
+                  <a:srgbClr val="F8FAFC"/>
+                </a:solidFill>
+              </a:defRPr>
+            </a:pPr>
+            <a:r>
+              <a:t>Track last N readings per zone</a:t>
+            </a:r>
+          </a:p>
+          <a:p>
+            <a:pPr>
+              <a:spcAft>
+                <a:spcPts val="800"/>
+              </a:spcAft>
+              <a:defRPr sz="1600">
+                <a:solidFill>
+                  <a:srgbClr val="F8FAFC"/>
+                </a:solidFill>
+              </a:defRPr>
+            </a:pPr>
+            <a:r>
+              <a:t>Rising at 0.9%+ → YELLOW warning</a:t>
+            </a:r>
+          </a:p>
+          <a:p>
+            <a:pPr>
+              <a:spcAft>
+                <a:spcPts val="800"/>
+              </a:spcAft>
+              <a:defRPr sz="1600">
+                <a:solidFill>
+                  <a:srgbClr val="F8FAFC"/>
+                </a:solidFill>
+              </a:defRPr>
+            </a:pPr>
+            <a:r>
+              <a:t>At 1.5%+ → RED + Reg 854 evacuation cited aloud</a:t>
+            </a:r>
+          </a:p>
+        </p:txBody>
+      </p:sp>
+      <p:sp>
+        <p:nvSpPr>
+          <p:cNvPr id="9" name="TextBox 8"/>
+          <p:cNvSpPr txBox="1"/>
+          <p:nvPr/>
+        </p:nvSpPr>
+        <p:spPr>
+          <a:xfrm>
+            <a:off x="822960" y="4572000"/>
+            <a:ext cx="10515600" cy="1371600"/>
+          </a:xfrm>
+          <a:prstGeom prst="rect">
+            <a:avLst/>
+          </a:prstGeom>
+          <a:noFill/>
+        </p:spPr>
+        <p:txBody>
+          <a:bodyPr wrap="square">
+            <a:spAutoFit/>
+          </a:bodyPr>
+          <a:lstStyle/>
+          <a:p>
+            <a:pPr algn="ctr">
+              <a:defRPr sz="1600" b="0">
+                <a:solidFill>
+                  <a:srgbClr val="F59E0B"/>
+                </a:solidFill>
+              </a:defRPr>
+            </a:pPr>
+            <a:r>
+              <a:t>Ventilation loop: fan ramps to dilute gas → zone clears → fan eases back to idle → all-clear voice message</a:t>
             </a:r>
           </a:p>
         </p:txBody>
@@ -6091,7 +6185,42 @@
         </p:nvSpPr>
         <p:spPr>
           <a:xfrm>
-            <a:off x="777240" y="411480"/>
+            <a:off x="777240" y="320040"/>
+            <a:ext cx="10515600" cy="320040"/>
+          </a:xfrm>
+          <a:prstGeom prst="rect">
+            <a:avLst/>
+          </a:prstGeom>
+          <a:noFill/>
+        </p:spPr>
+        <p:txBody>
+          <a:bodyPr wrap="square">
+            <a:spAutoFit/>
+          </a:bodyPr>
+          <a:lstStyle/>
+          <a:p>
+            <a:pPr algn="l">
+              <a:defRPr sz="1100" b="1">
+                <a:solidFill>
+                  <a:srgbClr val="38BDF8"/>
+                </a:solidFill>
+              </a:defRPr>
+            </a:pPr>
+            <a:r>
+              <a:t>JUDGING CRITERION 3 — Working prototype &amp; technical execution</a:t>
+            </a:r>
+          </a:p>
+        </p:txBody>
+      </p:sp>
+      <p:sp>
+        <p:nvSpPr>
+          <p:cNvPr id="4" name="TextBox 3"/>
+          <p:cNvSpPr txBox="1"/>
+          <p:nvPr/>
+        </p:nvSpPr>
+        <p:spPr>
+          <a:xfrm>
+            <a:off x="777240" y="594360"/>
             <a:ext cx="10515600" cy="640080"/>
           </a:xfrm>
           <a:prstGeom prst="rect">
@@ -6113,20 +6242,20 @@
               </a:defRPr>
             </a:pPr>
             <a:r>
-              <a:t>Key Differentiator: TREND, Not Threshold</a:t>
-            </a:r>
-          </a:p>
-        </p:txBody>
-      </p:sp>
-      <p:sp>
-        <p:nvSpPr>
-          <p:cNvPr id="4" name="TextBox 3"/>
-          <p:cNvSpPr txBox="1"/>
-          <p:nvPr/>
-        </p:nvSpPr>
-        <p:spPr>
-          <a:xfrm>
-            <a:off x="777240" y="960120"/>
+              <a:t>Working Prototype</a:t>
+            </a:r>
+          </a:p>
+        </p:txBody>
+      </p:sp>
+      <p:sp>
+        <p:nvSpPr>
+          <p:cNvPr id="5" name="TextBox 4"/>
+          <p:cNvSpPr txBox="1"/>
+          <p:nvPr/>
+        </p:nvSpPr>
+        <p:spPr>
+          <a:xfrm>
+            <a:off x="777240" y="1143000"/>
             <a:ext cx="10515600" cy="457200"/>
           </a:xfrm>
           <a:prstGeom prst="rect">
@@ -6148,42 +6277,7 @@
               </a:defRPr>
             </a:pPr>
             <a:r>
-              <a:t>The crew leaves before it's an emergency</a:t>
-            </a:r>
-          </a:p>
-        </p:txBody>
-      </p:sp>
-      <p:sp>
-        <p:nvSpPr>
-          <p:cNvPr id="5" name="TextBox 4"/>
-          <p:cNvSpPr txBox="1"/>
-          <p:nvPr/>
-        </p:nvSpPr>
-        <p:spPr>
-          <a:xfrm>
-            <a:off x="822960" y="1554480"/>
-            <a:ext cx="5029200" cy="914400"/>
-          </a:xfrm>
-          <a:prstGeom prst="rect">
-            <a:avLst/>
-          </a:prstGeom>
-          <a:noFill/>
-        </p:spPr>
-        <p:txBody>
-          <a:bodyPr wrap="square">
-            <a:spAutoFit/>
-          </a:bodyPr>
-          <a:lstStyle/>
-          <a:p>
-            <a:pPr algn="l">
-              <a:defRPr sz="1800" b="1">
-                <a:solidFill>
-                  <a:srgbClr val="EF4444"/>
-                </a:solidFill>
-              </a:defRPr>
-            </a:pPr>
-            <a:r>
-              <a:t>Traditional systems:</a:t>
+              <a:t>Live, runnable, and demonstrable right now</a:t>
             </a:r>
           </a:p>
         </p:txBody>
@@ -6196,8 +6290,8 @@
         </p:nvSpPr>
         <p:spPr>
           <a:xfrm>
-            <a:off x="822960" y="2103120"/>
-            <a:ext cx="5029200" cy="1828800"/>
+            <a:off x="822960" y="1691640"/>
+            <a:ext cx="5303520" cy="4114800"/>
           </a:xfrm>
           <a:prstGeom prst="rect">
             <a:avLst/>
@@ -6221,7 +6315,7 @@
               </a:defRPr>
             </a:pPr>
             <a:r>
-              <a:t>Alarm at 1.5% methane</a:t>
+              <a:t>FastAPI backend — running at localhost:8000</a:t>
             </a:r>
           </a:p>
           <a:p>
@@ -6236,67 +6330,9 @@
               </a:defRPr>
             </a:pPr>
             <a:r>
-              <a:t>Reactive — too late for orderly withdrawal</a:t>
-            </a:r>
-          </a:p>
-        </p:txBody>
-      </p:sp>
-      <p:sp>
-        <p:nvSpPr>
-          <p:cNvPr id="7" name="TextBox 6"/>
-          <p:cNvSpPr txBox="1"/>
-          <p:nvPr/>
-        </p:nvSpPr>
-        <p:spPr>
-          <a:xfrm>
-            <a:off x="6400800" y="1554480"/>
-            <a:ext cx="5029200" cy="914400"/>
-          </a:xfrm>
-          <a:prstGeom prst="rect">
-            <a:avLst/>
-          </a:prstGeom>
-          <a:noFill/>
-        </p:spPr>
-        <p:txBody>
-          <a:bodyPr wrap="square">
-            <a:spAutoFit/>
-          </a:bodyPr>
-          <a:lstStyle/>
-          <a:p>
-            <a:pPr algn="l">
-              <a:defRPr sz="1800" b="1">
-                <a:solidFill>
-                  <a:srgbClr val="22C55E"/>
-                </a:solidFill>
-              </a:defRPr>
-            </a:pPr>
-            <a:r>
-              <a:t>MineGuard Edge:</a:t>
-            </a:r>
-          </a:p>
-        </p:txBody>
-      </p:sp>
-      <p:sp>
-        <p:nvSpPr>
-          <p:cNvPr id="8" name="TextBox 7"/>
-          <p:cNvSpPr txBox="1"/>
-          <p:nvPr/>
-        </p:nvSpPr>
-        <p:spPr>
-          <a:xfrm>
-            <a:off x="6400800" y="2103120"/>
-            <a:ext cx="5029200" cy="2286000"/>
-          </a:xfrm>
-          <a:prstGeom prst="rect">
-            <a:avLst/>
-          </a:prstGeom>
-          <a:noFill/>
-        </p:spPr>
-        <p:txBody>
-          <a:bodyPr wrap="square">
-            <a:spAutoFit/>
-          </a:bodyPr>
-          <a:lstStyle/>
+              <a:t>4 simulated zones with live gas + fan telemetry</a:t>
+            </a:r>
+          </a:p>
           <a:p>
             <a:pPr>
               <a:spcAft>
@@ -6309,7 +6345,7 @@
               </a:defRPr>
             </a:pPr>
             <a:r>
-              <a:t>Track last N readings per zone</a:t>
+              <a:t>Trend detector + ventilation control loop implemented</a:t>
             </a:r>
           </a:p>
           <a:p>
@@ -6324,7 +6360,7 @@
               </a:defRPr>
             </a:pPr>
             <a:r>
-              <a:t>Flag rising methane at 0.9%+ → YELLOW</a:t>
+              <a:t>Reg 854 keyword retrieval + /ask endpoint</a:t>
             </a:r>
           </a:p>
           <a:p>
@@ -6339,7 +6375,90 @@
               </a:defRPr>
             </a:pPr>
             <a:r>
-              <a:t>Cross 1.5% → RED + cited evacuation procedure</a:t>
+              <a:t>Recovery detection — all-clear when zone returns to green</a:t>
+            </a:r>
+          </a:p>
+        </p:txBody>
+      </p:sp>
+      <p:sp>
+        <p:nvSpPr>
+          <p:cNvPr id="7" name="TextBox 6"/>
+          <p:cNvSpPr txBox="1"/>
+          <p:nvPr/>
+        </p:nvSpPr>
+        <p:spPr>
+          <a:xfrm>
+            <a:off x="6400800" y="1691640"/>
+            <a:ext cx="5029200" cy="365760"/>
+          </a:xfrm>
+          <a:prstGeom prst="rect">
+            <a:avLst/>
+          </a:prstGeom>
+          <a:noFill/>
+        </p:spPr>
+        <p:txBody>
+          <a:bodyPr wrap="square">
+            <a:spAutoFit/>
+          </a:bodyPr>
+          <a:lstStyle/>
+          <a:p>
+            <a:pPr algn="l">
+              <a:defRPr sz="1600" b="1">
+                <a:solidFill>
+                  <a:srgbClr val="F59E0B"/>
+                </a:solidFill>
+              </a:defRPr>
+            </a:pPr>
+            <a:r>
+              <a:t>API endpoints (live)</a:t>
+            </a:r>
+          </a:p>
+        </p:txBody>
+      </p:sp>
+      <p:sp>
+        <p:nvSpPr>
+          <p:cNvPr id="8" name="TextBox 7"/>
+          <p:cNvSpPr txBox="1"/>
+          <p:nvPr/>
+        </p:nvSpPr>
+        <p:spPr>
+          <a:xfrm>
+            <a:off x="6400800" y="2148840"/>
+            <a:ext cx="5029200" cy="2286000"/>
+          </a:xfrm>
+          <a:prstGeom prst="rect">
+            <a:avLst/>
+          </a:prstGeom>
+          <a:noFill/>
+        </p:spPr>
+        <p:txBody>
+          <a:bodyPr wrap="none">
+            <a:spAutoFit/>
+          </a:bodyPr>
+          <a:lstStyle/>
+          <a:p>
+            <a:pPr>
+              <a:defRPr sz="1300">
+                <a:solidFill>
+                  <a:srgbClr val="F8FAFC"/>
+                </a:solidFill>
+                <a:latin typeface="Courier New"/>
+              </a:defRPr>
+            </a:pPr>
+            <a:r>
+              <a:t>GET  /zones   → zone map data</a:t>
+            </a:r>
+            <a:br/>
+            <a:r>
+              <a:t>GET  /alert   → cited safety alert</a:t>
+            </a:r>
+            <a:br/>
+            <a:r>
+              <a:t>POST /ask     → Reg 854 Q&amp;A</a:t>
+            </a:r>
+            <a:br/>
+            <a:r>
+              <a:t>GET  /health  → system status</a:t>
             </a:r>
           </a:p>
         </p:txBody>
@@ -6352,29 +6471,29 @@
         </p:nvSpPr>
         <p:spPr>
           <a:xfrm>
-            <a:off x="822960" y="4754880"/>
-            <a:ext cx="10515600" cy="1097280"/>
-          </a:xfrm>
-          <a:prstGeom prst="rect">
-            <a:avLst/>
-          </a:prstGeom>
-          <a:noFill/>
-        </p:spPr>
-        <p:txBody>
-          <a:bodyPr wrap="square">
-            <a:spAutoFit/>
-          </a:bodyPr>
-          <a:lstStyle/>
-          <a:p>
-            <a:pPr algn="ctr">
-              <a:defRPr sz="1600" b="0">
-                <a:solidFill>
-                  <a:srgbClr val="F59E0B"/>
-                </a:solidFill>
-              </a:defRPr>
-            </a:pPr>
-            <a:r>
-              <a:t>Status flow:  GREEN (stable)  →  YELLOW (rising)  →  RED (danger)  →  GREEN (ventilation restored)</a:t>
+            <a:off x="822960" y="5303520"/>
+            <a:ext cx="10515600" cy="731520"/>
+          </a:xfrm>
+          <a:prstGeom prst="rect">
+            <a:avLst/>
+          </a:prstGeom>
+          <a:noFill/>
+        </p:spPr>
+        <p:txBody>
+          <a:bodyPr wrap="square">
+            <a:spAutoFit/>
+          </a:bodyPr>
+          <a:lstStyle/>
+          <a:p>
+            <a:pPr algn="l">
+              <a:defRPr sz="1400" b="0">
+                <a:solidFill>
+                  <a:srgbClr val="94A3B8"/>
+                </a:solidFill>
+              </a:defRPr>
+            </a:pPr>
+            <a:r>
+              <a:t>Tech: Python · FastAPI · Mosquitto MQTT · paho-mqtt · Web Speech API · Lovable UI</a:t>
             </a:r>
           </a:p>
         </p:txBody>
@@ -6456,7 +6575,42 @@
         </p:nvSpPr>
         <p:spPr>
           <a:xfrm>
-            <a:off x="777240" y="411480"/>
+            <a:off x="777240" y="320040"/>
+            <a:ext cx="10515600" cy="320040"/>
+          </a:xfrm>
+          <a:prstGeom prst="rect">
+            <a:avLst/>
+          </a:prstGeom>
+          <a:noFill/>
+        </p:spPr>
+        <p:txBody>
+          <a:bodyPr wrap="square">
+            <a:spAutoFit/>
+          </a:bodyPr>
+          <a:lstStyle/>
+          <a:p>
+            <a:pPr algn="l">
+              <a:defRPr sz="1100" b="1">
+                <a:solidFill>
+                  <a:srgbClr val="38BDF8"/>
+                </a:solidFill>
+              </a:defRPr>
+            </a:pPr>
+            <a:r>
+              <a:t>JUDGING CRITERION 5 — Presentation &amp; pitch</a:t>
+            </a:r>
+          </a:p>
+        </p:txBody>
+      </p:sp>
+      <p:sp>
+        <p:nvSpPr>
+          <p:cNvPr id="4" name="TextBox 3"/>
+          <p:cNvSpPr txBox="1"/>
+          <p:nvPr/>
+        </p:nvSpPr>
+        <p:spPr>
+          <a:xfrm>
+            <a:off x="777240" y="594360"/>
             <a:ext cx="10515600" cy="640080"/>
           </a:xfrm>
           <a:prstGeom prst="rect">
@@ -6478,20 +6632,20 @@
               </a:defRPr>
             </a:pPr>
             <a:r>
-              <a:t>Smart Ventilation Loop</a:t>
-            </a:r>
-          </a:p>
-        </p:txBody>
-      </p:sp>
-      <p:sp>
-        <p:nvSpPr>
-          <p:cNvPr id="4" name="TextBox 3"/>
-          <p:cNvSpPr txBox="1"/>
-          <p:nvPr/>
-        </p:nvSpPr>
-        <p:spPr>
-          <a:xfrm>
-            <a:off x="777240" y="960120"/>
+              <a:t>Live Demo — 60 Seconds</a:t>
+            </a:r>
+          </a:p>
+        </p:txBody>
+      </p:sp>
+      <p:sp>
+        <p:nvSpPr>
+          <p:cNvPr id="5" name="TextBox 4"/>
+          <p:cNvSpPr txBox="1"/>
+          <p:nvPr/>
+        </p:nvSpPr>
+        <p:spPr>
+          <a:xfrm>
+            <a:off x="777240" y="1143000"/>
             <a:ext cx="10515600" cy="457200"/>
           </a:xfrm>
           <a:prstGeom prst="rect">
@@ -6513,119 +6667,371 @@
               </a:defRPr>
             </a:pPr>
             <a:r>
-              <a:t>Detect → Act → Recover</a:t>
-            </a:r>
-          </a:p>
-        </p:txBody>
-      </p:sp>
-      <p:sp>
-        <p:nvSpPr>
-          <p:cNvPr id="5" name="TextBox 4"/>
-          <p:cNvSpPr txBox="1"/>
-          <p:nvPr/>
-        </p:nvSpPr>
-        <p:spPr>
-          <a:xfrm>
-            <a:off x="822960" y="1554480"/>
-            <a:ext cx="10241280" cy="4389120"/>
-          </a:xfrm>
-          <a:prstGeom prst="rect">
-            <a:avLst/>
-          </a:prstGeom>
-          <a:noFill/>
-        </p:spPr>
-        <p:txBody>
-          <a:bodyPr wrap="square">
-            <a:spAutoFit/>
-          </a:bodyPr>
-          <a:lstStyle/>
-          <a:p>
-            <a:pPr>
-              <a:spcAft>
-                <a:spcPts val="800"/>
-              </a:spcAft>
-              <a:defRPr sz="1800">
+              <a:t>Problem → solution → impact in one linear flow</a:t>
+            </a:r>
+          </a:p>
+        </p:txBody>
+      </p:sp>
+      <p:sp>
+        <p:nvSpPr>
+          <p:cNvPr id="6" name="TextBox 5"/>
+          <p:cNvSpPr txBox="1"/>
+          <p:nvPr/>
+        </p:nvSpPr>
+        <p:spPr>
+          <a:xfrm>
+            <a:off x="822960" y="1691640"/>
+            <a:ext cx="1097280" cy="320040"/>
+          </a:xfrm>
+          <a:prstGeom prst="rect">
+            <a:avLst/>
+          </a:prstGeom>
+          <a:noFill/>
+        </p:spPr>
+        <p:txBody>
+          <a:bodyPr wrap="square">
+            <a:spAutoFit/>
+          </a:bodyPr>
+          <a:lstStyle/>
+          <a:p>
+            <a:pPr algn="l">
+              <a:defRPr sz="1400" b="1">
+                <a:solidFill>
+                  <a:srgbClr val="F59E0B"/>
+                </a:solidFill>
+              </a:defRPr>
+            </a:pPr>
+            <a:r>
+              <a:t>0:00</a:t>
+            </a:r>
+          </a:p>
+        </p:txBody>
+      </p:sp>
+      <p:sp>
+        <p:nvSpPr>
+          <p:cNvPr id="7" name="TextBox 6"/>
+          <p:cNvSpPr txBox="1"/>
+          <p:nvPr/>
+        </p:nvSpPr>
+        <p:spPr>
+          <a:xfrm>
+            <a:off x="2011680" y="1691640"/>
+            <a:ext cx="8686800" cy="320040"/>
+          </a:xfrm>
+          <a:prstGeom prst="rect">
+            <a:avLst/>
+          </a:prstGeom>
+          <a:noFill/>
+        </p:spPr>
+        <p:txBody>
+          <a:bodyPr wrap="square">
+            <a:spAutoFit/>
+          </a:bodyPr>
+          <a:lstStyle/>
+          <a:p>
+            <a:pPr algn="l">
+              <a:defRPr sz="1600" b="0">
                 <a:solidFill>
                   <a:srgbClr val="F8FAFC"/>
                 </a:solidFill>
               </a:defRPr>
             </a:pPr>
             <a:r>
-              <a:t>Gas inrush detected → fan ramps from 20% idle toward maximum</a:t>
-            </a:r>
-          </a:p>
-          <a:p>
-            <a:pPr>
-              <a:spcAft>
-                <a:spcPts val="800"/>
-              </a:spcAft>
-              <a:defRPr sz="1800">
+              <a:t>Zone map all GREEN — normal underground shift</a:t>
+            </a:r>
+          </a:p>
+        </p:txBody>
+      </p:sp>
+      <p:sp>
+        <p:nvSpPr>
+          <p:cNvPr id="8" name="TextBox 7"/>
+          <p:cNvSpPr txBox="1"/>
+          <p:nvPr/>
+        </p:nvSpPr>
+        <p:spPr>
+          <a:xfrm>
+            <a:off x="822960" y="2167128"/>
+            <a:ext cx="1097280" cy="320040"/>
+          </a:xfrm>
+          <a:prstGeom prst="rect">
+            <a:avLst/>
+          </a:prstGeom>
+          <a:noFill/>
+        </p:spPr>
+        <p:txBody>
+          <a:bodyPr wrap="square">
+            <a:spAutoFit/>
+          </a:bodyPr>
+          <a:lstStyle/>
+          <a:p>
+            <a:pPr algn="l">
+              <a:defRPr sz="1400" b="1">
+                <a:solidFill>
+                  <a:srgbClr val="F59E0B"/>
+                </a:solidFill>
+              </a:defRPr>
+            </a:pPr>
+            <a:r>
+              <a:t>0:15</a:t>
+            </a:r>
+          </a:p>
+        </p:txBody>
+      </p:sp>
+      <p:sp>
+        <p:nvSpPr>
+          <p:cNvPr id="9" name="TextBox 8"/>
+          <p:cNvSpPr txBox="1"/>
+          <p:nvPr/>
+        </p:nvSpPr>
+        <p:spPr>
+          <a:xfrm>
+            <a:off x="2011680" y="2167128"/>
+            <a:ext cx="8686800" cy="320040"/>
+          </a:xfrm>
+          <a:prstGeom prst="rect">
+            <a:avLst/>
+          </a:prstGeom>
+          <a:noFill/>
+        </p:spPr>
+        <p:txBody>
+          <a:bodyPr wrap="square">
+            <a:spAutoFit/>
+          </a:bodyPr>
+          <a:lstStyle/>
+          <a:p>
+            <a:pPr algn="l">
+              <a:defRPr sz="1600" b="0">
                 <a:solidFill>
                   <a:srgbClr val="F8FAFC"/>
                 </a:solidFill>
               </a:defRPr>
             </a:pPr>
             <a:r>
-              <a:t>Increased airflow dilutes and sweeps methane out of the zone</a:t>
-            </a:r>
-          </a:p>
-          <a:p>
-            <a:pPr>
-              <a:spcAft>
-                <a:spcPts val="800"/>
-              </a:spcAft>
-              <a:defRPr sz="1800">
+              <a:t>Zone 3 methane CLIMBING → YELLOW + rising arrow (the trend)</a:t>
+            </a:r>
+          </a:p>
+        </p:txBody>
+      </p:sp>
+      <p:sp>
+        <p:nvSpPr>
+          <p:cNvPr id="10" name="TextBox 9"/>
+          <p:cNvSpPr txBox="1"/>
+          <p:nvPr/>
+        </p:nvSpPr>
+        <p:spPr>
+          <a:xfrm>
+            <a:off x="822960" y="2642616"/>
+            <a:ext cx="1097280" cy="320040"/>
+          </a:xfrm>
+          <a:prstGeom prst="rect">
+            <a:avLst/>
+          </a:prstGeom>
+          <a:noFill/>
+        </p:spPr>
+        <p:txBody>
+          <a:bodyPr wrap="square">
+            <a:spAutoFit/>
+          </a:bodyPr>
+          <a:lstStyle/>
+          <a:p>
+            <a:pPr algn="l">
+              <a:defRPr sz="1400" b="1">
+                <a:solidFill>
+                  <a:srgbClr val="F59E0B"/>
+                </a:solidFill>
+              </a:defRPr>
+            </a:pPr>
+            <a:r>
+              <a:t>0:30</a:t>
+            </a:r>
+          </a:p>
+        </p:txBody>
+      </p:sp>
+      <p:sp>
+        <p:nvSpPr>
+          <p:cNvPr id="11" name="TextBox 10"/>
+          <p:cNvSpPr txBox="1"/>
+          <p:nvPr/>
+        </p:nvSpPr>
+        <p:spPr>
+          <a:xfrm>
+            <a:off x="2011680" y="2642616"/>
+            <a:ext cx="8686800" cy="320040"/>
+          </a:xfrm>
+          <a:prstGeom prst="rect">
+            <a:avLst/>
+          </a:prstGeom>
+          <a:noFill/>
+        </p:spPr>
+        <p:txBody>
+          <a:bodyPr wrap="square">
+            <a:spAutoFit/>
+          </a:bodyPr>
+          <a:lstStyle/>
+          <a:p>
+            <a:pPr algn="l">
+              <a:defRPr sz="1600" b="0">
                 <a:solidFill>
                   <a:srgbClr val="F8FAFC"/>
                 </a:solidFill>
               </a:defRPr>
             </a:pPr>
             <a:r>
-              <a:t>As gas clears, fan eases back — saves power underground</a:t>
-            </a:r>
-          </a:p>
-          <a:p>
-            <a:pPr>
-              <a:spcAft>
-                <a:spcPts val="800"/>
-              </a:spcAft>
-              <a:defRPr sz="1800">
+              <a:t>Fan ramps — ventilation actively mitigating</a:t>
+            </a:r>
+          </a:p>
+        </p:txBody>
+      </p:sp>
+      <p:sp>
+        <p:nvSpPr>
+          <p:cNvPr id="12" name="TextBox 11"/>
+          <p:cNvSpPr txBox="1"/>
+          <p:nvPr/>
+        </p:nvSpPr>
+        <p:spPr>
+          <a:xfrm>
+            <a:off x="822960" y="3118104"/>
+            <a:ext cx="1097280" cy="320040"/>
+          </a:xfrm>
+          <a:prstGeom prst="rect">
+            <a:avLst/>
+          </a:prstGeom>
+          <a:noFill/>
+        </p:spPr>
+        <p:txBody>
+          <a:bodyPr wrap="square">
+            <a:spAutoFit/>
+          </a:bodyPr>
+          <a:lstStyle/>
+          <a:p>
+            <a:pPr algn="l">
+              <a:defRPr sz="1400" b="1">
+                <a:solidFill>
+                  <a:srgbClr val="F59E0B"/>
+                </a:solidFill>
+              </a:defRPr>
+            </a:pPr>
+            <a:r>
+              <a:t>0:40</a:t>
+            </a:r>
+          </a:p>
+        </p:txBody>
+      </p:sp>
+      <p:sp>
+        <p:nvSpPr>
+          <p:cNvPr id="13" name="TextBox 12"/>
+          <p:cNvSpPr txBox="1"/>
+          <p:nvPr/>
+        </p:nvSpPr>
+        <p:spPr>
+          <a:xfrm>
+            <a:off x="2011680" y="3118104"/>
+            <a:ext cx="8686800" cy="320040"/>
+          </a:xfrm>
+          <a:prstGeom prst="rect">
+            <a:avLst/>
+          </a:prstGeom>
+          <a:noFill/>
+        </p:spPr>
+        <p:txBody>
+          <a:bodyPr wrap="square">
+            <a:spAutoFit/>
+          </a:bodyPr>
+          <a:lstStyle/>
+          <a:p>
+            <a:pPr algn="l">
+              <a:defRPr sz="1600" b="0">
                 <a:solidFill>
                   <a:srgbClr val="F8FAFC"/>
                 </a:solidFill>
               </a:defRPr>
             </a:pPr>
             <a:r>
-              <a:t>Critical rule: we NEVER enrich oxygen (raises explosion risk)</a:t>
-            </a:r>
-          </a:p>
-          <a:p>
-            <a:pPr>
-              <a:spcAft>
-                <a:spcPts val="800"/>
-              </a:spcAft>
-              <a:defRPr sz="1800">
+              <a:t>Crosses 1.5% → RED · banner · voice reads Reg 854 procedure</a:t>
+            </a:r>
+          </a:p>
+        </p:txBody>
+      </p:sp>
+      <p:sp>
+        <p:nvSpPr>
+          <p:cNvPr id="14" name="TextBox 13"/>
+          <p:cNvSpPr txBox="1"/>
+          <p:nvPr/>
+        </p:nvSpPr>
+        <p:spPr>
+          <a:xfrm>
+            <a:off x="822960" y="3593592"/>
+            <a:ext cx="1097280" cy="320040"/>
+          </a:xfrm>
+          <a:prstGeom prst="rect">
+            <a:avLst/>
+          </a:prstGeom>
+          <a:noFill/>
+        </p:spPr>
+        <p:txBody>
+          <a:bodyPr wrap="square">
+            <a:spAutoFit/>
+          </a:bodyPr>
+          <a:lstStyle/>
+          <a:p>
+            <a:pPr algn="l">
+              <a:defRPr sz="1400" b="1">
+                <a:solidFill>
+                  <a:srgbClr val="F59E0B"/>
+                </a:solidFill>
+              </a:defRPr>
+            </a:pPr>
+            <a:r>
+              <a:t>0:50</a:t>
+            </a:r>
+          </a:p>
+        </p:txBody>
+      </p:sp>
+      <p:sp>
+        <p:nvSpPr>
+          <p:cNvPr id="15" name="TextBox 14"/>
+          <p:cNvSpPr txBox="1"/>
+          <p:nvPr/>
+        </p:nvSpPr>
+        <p:spPr>
+          <a:xfrm>
+            <a:off x="2011680" y="3593592"/>
+            <a:ext cx="8686800" cy="320040"/>
+          </a:xfrm>
+          <a:prstGeom prst="rect">
+            <a:avLst/>
+          </a:prstGeom>
+          <a:noFill/>
+        </p:spPr>
+        <p:txBody>
+          <a:bodyPr wrap="square">
+            <a:spAutoFit/>
+          </a:bodyPr>
+          <a:lstStyle/>
+          <a:p>
+            <a:pPr algn="l">
+              <a:defRPr sz="1600" b="0">
                 <a:solidFill>
                   <a:srgbClr val="F8FAFC"/>
                 </a:solidFill>
               </a:defRPr>
             </a:pPr>
             <a:r>
-              <a:t>All-clear voice message when zone returns to green</a:t>
-            </a:r>
-          </a:p>
-        </p:txBody>
-      </p:sp>
-      <p:sp>
-        <p:nvSpPr>
-          <p:cNvPr id="6" name="TextBox 5"/>
-          <p:cNvSpPr txBox="1"/>
-          <p:nvPr/>
-        </p:nvSpPr>
-        <p:spPr>
-          <a:xfrm>
-            <a:off x="822960" y="5303520"/>
-            <a:ext cx="10058400" cy="731520"/>
+              <a:t>Turn WIFI OFF · run demo again · still works (offline proof)</a:t>
+            </a:r>
+          </a:p>
+        </p:txBody>
+      </p:sp>
+      <p:sp>
+        <p:nvSpPr>
+          <p:cNvPr id="16" name="TextBox 15"/>
+          <p:cNvSpPr txBox="1"/>
+          <p:nvPr/>
+        </p:nvSpPr>
+        <p:spPr>
+          <a:xfrm>
+            <a:off x="822960" y="4069080"/>
+            <a:ext cx="1097280" cy="320040"/>
           </a:xfrm>
           <a:prstGeom prst="rect">
             <a:avLst/>
@@ -6639,14 +7045,84 @@
           <a:lstStyle/>
           <a:p>
             <a:pPr algn="l">
-              <a:defRPr sz="1400" b="0">
+              <a:defRPr sz="1400" b="1">
+                <a:solidFill>
+                  <a:srgbClr val="F59E0B"/>
+                </a:solidFill>
+              </a:defRPr>
+            </a:pPr>
+            <a:r>
+              <a:t>1:00</a:t>
+            </a:r>
+          </a:p>
+        </p:txBody>
+      </p:sp>
+      <p:sp>
+        <p:nvSpPr>
+          <p:cNvPr id="17" name="TextBox 16"/>
+          <p:cNvSpPr txBox="1"/>
+          <p:nvPr/>
+        </p:nvSpPr>
+        <p:spPr>
+          <a:xfrm>
+            <a:off x="2011680" y="4069080"/>
+            <a:ext cx="8686800" cy="320040"/>
+          </a:xfrm>
+          <a:prstGeom prst="rect">
+            <a:avLst/>
+          </a:prstGeom>
+          <a:noFill/>
+        </p:spPr>
+        <p:txBody>
+          <a:bodyPr wrap="square">
+            <a:spAutoFit/>
+          </a:bodyPr>
+          <a:lstStyle/>
+          <a:p>
+            <a:pPr algn="l">
+              <a:defRPr sz="1600" b="0">
+                <a:solidFill>
+                  <a:srgbClr val="F8FAFC"/>
+                </a:solidFill>
+              </a:defRPr>
+            </a:pPr>
+            <a:r>
+              <a:t>Zone clears → "Zone 3 stabilized. Everything under control."</a:t>
+            </a:r>
+          </a:p>
+        </p:txBody>
+      </p:sp>
+      <p:sp>
+        <p:nvSpPr>
+          <p:cNvPr id="18" name="TextBox 17"/>
+          <p:cNvSpPr txBox="1"/>
+          <p:nvPr/>
+        </p:nvSpPr>
+        <p:spPr>
+          <a:xfrm>
+            <a:off x="822960" y="5486400"/>
+            <a:ext cx="10058400" cy="457200"/>
+          </a:xfrm>
+          <a:prstGeom prst="rect">
+            <a:avLst/>
+          </a:prstGeom>
+          <a:noFill/>
+        </p:spPr>
+        <p:txBody>
+          <a:bodyPr wrap="square">
+            <a:spAutoFit/>
+          </a:bodyPr>
+          <a:lstStyle/>
+          <a:p>
+            <a:pPr algn="l">
+              <a:defRPr sz="1200" b="0">
                 <a:solidFill>
                   <a:srgbClr val="94A3B8"/>
                 </a:solidFill>
               </a:defRPr>
             </a:pPr>
             <a:r>
-              <a:t>Safety actions at RED: max airflow · cut non-flameproof power · stop ignition work · evacuate</a:t>
+              <a:t>Backup: pre-recorded demo video if live fails</a:t>
             </a:r>
           </a:p>
         </p:txBody>
@@ -6728,7 +7204,42 @@
         </p:nvSpPr>
         <p:spPr>
           <a:xfrm>
-            <a:off x="777240" y="411480"/>
+            <a:off x="777240" y="320040"/>
+            <a:ext cx="10515600" cy="320040"/>
+          </a:xfrm>
+          <a:prstGeom prst="rect">
+            <a:avLst/>
+          </a:prstGeom>
+          <a:noFill/>
+        </p:spPr>
+        <p:txBody>
+          <a:bodyPr wrap="square">
+            <a:spAutoFit/>
+          </a:bodyPr>
+          <a:lstStyle/>
+          <a:p>
+            <a:pPr algn="l">
+              <a:defRPr sz="1100" b="1">
+                <a:solidFill>
+                  <a:srgbClr val="38BDF8"/>
+                </a:solidFill>
+              </a:defRPr>
+            </a:pPr>
+            <a:r>
+              <a:t>JUDGING CRITERION 4 — Impact &amp; feasibility</a:t>
+            </a:r>
+          </a:p>
+        </p:txBody>
+      </p:sp>
+      <p:sp>
+        <p:nvSpPr>
+          <p:cNvPr id="4" name="TextBox 3"/>
+          <p:cNvSpPr txBox="1"/>
+          <p:nvPr/>
+        </p:nvSpPr>
+        <p:spPr>
+          <a:xfrm>
+            <a:off x="777240" y="594360"/>
             <a:ext cx="10515600" cy="640080"/>
           </a:xfrm>
           <a:prstGeom prst="rect">
@@ -6750,20 +7261,20 @@
               </a:defRPr>
             </a:pPr>
             <a:r>
-              <a:t>Grounded in Regulation</a:t>
-            </a:r>
-          </a:p>
-        </p:txBody>
-      </p:sp>
-      <p:sp>
-        <p:nvSpPr>
-          <p:cNvPr id="4" name="TextBox 3"/>
-          <p:cNvSpPr txBox="1"/>
-          <p:nvPr/>
-        </p:nvSpPr>
-        <p:spPr>
-          <a:xfrm>
-            <a:off x="777240" y="960120"/>
+              <a:t>Impact &amp; Feasibility</a:t>
+            </a:r>
+          </a:p>
+        </p:txBody>
+      </p:sp>
+      <p:sp>
+        <p:nvSpPr>
+          <p:cNvPr id="5" name="TextBox 4"/>
+          <p:cNvSpPr txBox="1"/>
+          <p:nvPr/>
+        </p:nvSpPr>
+        <p:spPr>
+          <a:xfrm>
+            <a:off x="777240" y="1143000"/>
             <a:ext cx="10515600" cy="457200"/>
           </a:xfrm>
           <a:prstGeom prst="rect">
@@ -6785,21 +7296,21 @@
               </a:defRPr>
             </a:pPr>
             <a:r>
-              <a:t>O. Reg 854 — Mines and Mining Plants</a:t>
-            </a:r>
-          </a:p>
-        </p:txBody>
-      </p:sp>
-      <p:sp>
-        <p:nvSpPr>
-          <p:cNvPr id="5" name="TextBox 4"/>
-          <p:cNvSpPr txBox="1"/>
-          <p:nvPr/>
-        </p:nvSpPr>
-        <p:spPr>
-          <a:xfrm>
-            <a:off x="822960" y="1554480"/>
-            <a:ext cx="10241280" cy="3200400"/>
+              <a:t>Meaningful value with a clear path to deployment</a:t>
+            </a:r>
+          </a:p>
+        </p:txBody>
+      </p:sp>
+      <p:sp>
+        <p:nvSpPr>
+          <p:cNvPr id="6" name="TextBox 5"/>
+          <p:cNvSpPr txBox="1"/>
+          <p:nvPr/>
+        </p:nvSpPr>
+        <p:spPr>
+          <a:xfrm>
+            <a:off x="822960" y="1691640"/>
+            <a:ext cx="5303520" cy="3657600"/>
           </a:xfrm>
           <a:prstGeom prst="rect">
             <a:avLst/>
@@ -6816,14 +7327,14 @@
               <a:spcAft>
                 <a:spcPts val="800"/>
               </a:spcAft>
-              <a:defRPr sz="1800">
+              <a:defRPr sz="1600">
                 <a:solidFill>
                   <a:srgbClr val="F8FAFC"/>
                 </a:solidFill>
               </a:defRPr>
             </a:pPr>
             <a:r>
-              <a:t>5 local Reg 854 text sections indexed offline</a:t>
+              <a:t>Early warning → orderly withdrawal, not emergency scramble</a:t>
             </a:r>
           </a:p>
           <a:p>
@@ -6831,14 +7342,14 @@
               <a:spcAft>
                 <a:spcPts val="800"/>
               </a:spcAft>
-              <a:defRPr sz="1800">
+              <a:defRPr sz="1600">
                 <a:solidFill>
                   <a:srgbClr val="F8FAFC"/>
                 </a:solidFill>
               </a:defRPr>
             </a:pPr>
             <a:r>
-              <a:t>Keyword retrieval — no cloud LLM required</a:t>
+              <a:t>Lives protected — cited Reg 854 procedures reduce human error</a:t>
             </a:r>
           </a:p>
           <a:p>
@@ -6846,14 +7357,14 @@
               <a:spcAft>
                 <a:spcPts val="800"/>
               </a:spcAft>
-              <a:defRPr sz="1800">
+              <a:defRPr sz="1600">
                 <a:solidFill>
                   <a:srgbClr val="F8FAFC"/>
                 </a:solidFill>
               </a:defRPr>
             </a:pPr>
             <a:r>
-              <a:t>Every alert includes source citation (section + text)</a:t>
+              <a:t>Works when comms fail — offline edge, no central server</a:t>
             </a:r>
           </a:p>
           <a:p>
@@ -6861,28 +7372,43 @@
               <a:spcAft>
                 <a:spcPts val="800"/>
               </a:spcAft>
-              <a:defRPr sz="1800">
+              <a:defRPr sz="1600">
                 <a:solidFill>
                   <a:srgbClr val="F8FAFC"/>
                 </a:solidFill>
               </a:defRPr>
             </a:pPr>
             <a:r>
-              <a:t>POST /ask — free-text safety questions answered from local docs</a:t>
-            </a:r>
-          </a:p>
-        </p:txBody>
-      </p:sp>
-      <p:sp>
-        <p:nvSpPr>
-          <p:cNvPr id="6" name="TextBox 5"/>
-          <p:cNvSpPr txBox="1"/>
-          <p:nvPr/>
-        </p:nvSpPr>
-        <p:spPr>
-          <a:xfrm>
-            <a:off x="822960" y="4572000"/>
-            <a:ext cx="10515600" cy="1371600"/>
+              <a:t>Power savings — fans idle until gas builds, then ramp</a:t>
+            </a:r>
+          </a:p>
+          <a:p>
+            <a:pPr>
+              <a:spcAft>
+                <a:spcPts val="800"/>
+              </a:spcAft>
+              <a:defRPr sz="1600">
+                <a:solidFill>
+                  <a:srgbClr val="F8FAFC"/>
+                </a:solidFill>
+              </a:defRPr>
+            </a:pPr>
+            <a:r>
+              <a:t>Auditable — every alert cites O. Reg 854 section + text</a:t>
+            </a:r>
+          </a:p>
+        </p:txBody>
+      </p:sp>
+      <p:sp>
+        <p:nvSpPr>
+          <p:cNvPr id="7" name="TextBox 6"/>
+          <p:cNvSpPr txBox="1"/>
+          <p:nvPr/>
+        </p:nvSpPr>
+        <p:spPr>
+          <a:xfrm>
+            <a:off x="6400800" y="1691640"/>
+            <a:ext cx="5029200" cy="365760"/>
           </a:xfrm>
           <a:prstGeom prst="rect">
             <a:avLst/>
@@ -6896,14 +7422,97 @@
           <a:lstStyle/>
           <a:p>
             <a:pPr algn="l">
-              <a:defRPr sz="1500" b="0">
-                <a:solidFill>
-                  <a:srgbClr val="F59E0B"/>
-                </a:solidFill>
-              </a:defRPr>
-            </a:pPr>
-            <a:r>
-              <a:t>Example: "Withdraw all persons from the affected area to a place of safety. Do not re-enter until gas levels are confirmed safe by a qualified person."</a:t>
+              <a:defRPr sz="1600" b="1">
+                <a:solidFill>
+                  <a:srgbClr val="22C55E"/>
+                </a:solidFill>
+              </a:defRPr>
+            </a:pPr>
+            <a:r>
+              <a:t>Next steps to deploy</a:t>
+            </a:r>
+          </a:p>
+        </p:txBody>
+      </p:sp>
+      <p:sp>
+        <p:nvSpPr>
+          <p:cNvPr id="8" name="TextBox 7"/>
+          <p:cNvSpPr txBox="1"/>
+          <p:nvPr/>
+        </p:nvSpPr>
+        <p:spPr>
+          <a:xfrm>
+            <a:off x="6400800" y="2148840"/>
+            <a:ext cx="5029200" cy="3200400"/>
+          </a:xfrm>
+          <a:prstGeom prst="rect">
+            <a:avLst/>
+          </a:prstGeom>
+          <a:noFill/>
+        </p:spPr>
+        <p:txBody>
+          <a:bodyPr wrap="square">
+            <a:spAutoFit/>
+          </a:bodyPr>
+          <a:lstStyle/>
+          <a:p>
+            <a:pPr>
+              <a:spcAft>
+                <a:spcPts val="800"/>
+              </a:spcAft>
+              <a:defRPr sz="1500">
+                <a:solidFill>
+                  <a:srgbClr val="F8FAFC"/>
+                </a:solidFill>
+              </a:defRPr>
+            </a:pPr>
+            <a:r>
+              <a:t>Phase 1: Deploy edge box per zone on existing mesh</a:t>
+            </a:r>
+          </a:p>
+          <a:p>
+            <a:pPr>
+              <a:spcAft>
+                <a:spcPts val="800"/>
+              </a:spcAft>
+              <a:defRPr sz="1500">
+                <a:solidFill>
+                  <a:srgbClr val="F8FAFC"/>
+                </a:solidFill>
+              </a:defRPr>
+            </a:pPr>
+            <a:r>
+              <a:t>Phase 2: Connect real methane / CO sensor hardware</a:t>
+            </a:r>
+          </a:p>
+          <a:p>
+            <a:pPr>
+              <a:spcAft>
+                <a:spcPts val="800"/>
+              </a:spcAft>
+              <a:defRPr sz="1500">
+                <a:solidFill>
+                  <a:srgbClr val="F8FAFC"/>
+                </a:solidFill>
+              </a:defRPr>
+            </a:pPr>
+            <a:r>
+              <a:t>Phase 3: Integrate cap-lamp TTS for hands-free alerts</a:t>
+            </a:r>
+          </a:p>
+          <a:p>
+            <a:pPr>
+              <a:spcAft>
+                <a:spcPts val="800"/>
+              </a:spcAft>
+              <a:defRPr sz="1500">
+                <a:solidFill>
+                  <a:srgbClr val="F8FAFC"/>
+                </a:solidFill>
+              </a:defRPr>
+            </a:pPr>
+            <a:r>
+              <a:t>Phase 4: Surface sync for incident logs &amp; compliance</a:t>
             </a:r>
           </a:p>
         </p:txBody>
@@ -6985,7 +7594,42 @@
         </p:nvSpPr>
         <p:spPr>
           <a:xfrm>
-            <a:off x="777240" y="411480"/>
+            <a:off x="777240" y="320040"/>
+            <a:ext cx="10515600" cy="320040"/>
+          </a:xfrm>
+          <a:prstGeom prst="rect">
+            <a:avLst/>
+          </a:prstGeom>
+          <a:noFill/>
+        </p:spPr>
+        <p:txBody>
+          <a:bodyPr wrap="square">
+            <a:spAutoFit/>
+          </a:bodyPr>
+          <a:lstStyle/>
+          <a:p>
+            <a:pPr algn="l">
+              <a:defRPr sz="1100" b="1">
+                <a:solidFill>
+                  <a:srgbClr val="38BDF8"/>
+                </a:solidFill>
+              </a:defRPr>
+            </a:pPr>
+            <a:r>
+              <a:t>JUDGING CRITERION 6 — Responsible design &amp; awareness of limitations</a:t>
+            </a:r>
+          </a:p>
+        </p:txBody>
+      </p:sp>
+      <p:sp>
+        <p:nvSpPr>
+          <p:cNvPr id="4" name="TextBox 3"/>
+          <p:cNvSpPr txBox="1"/>
+          <p:nvPr/>
+        </p:nvSpPr>
+        <p:spPr>
+          <a:xfrm>
+            <a:off x="777240" y="594360"/>
             <a:ext cx="10515600" cy="640080"/>
           </a:xfrm>
           <a:prstGeom prst="rect">
@@ -7007,20 +7651,20 @@
               </a:defRPr>
             </a:pPr>
             <a:r>
-              <a:t>Technology Stack</a:t>
-            </a:r>
-          </a:p>
-        </p:txBody>
-      </p:sp>
-      <p:sp>
-        <p:nvSpPr>
-          <p:cNvPr id="4" name="TextBox 3"/>
-          <p:cNvSpPr txBox="1"/>
-          <p:nvPr/>
-        </p:nvSpPr>
-        <p:spPr>
-          <a:xfrm>
-            <a:off x="777240" y="960120"/>
+              <a:t>Responsible Design &amp; Limitations</a:t>
+            </a:r>
+          </a:p>
+        </p:txBody>
+      </p:sp>
+      <p:sp>
+        <p:nvSpPr>
+          <p:cNvPr id="5" name="TextBox 4"/>
+          <p:cNvSpPr txBox="1"/>
+          <p:nvPr/>
+        </p:nvSpPr>
+        <p:spPr>
+          <a:xfrm>
+            <a:off x="777240" y="1143000"/>
             <a:ext cx="10515600" cy="457200"/>
           </a:xfrm>
           <a:prstGeom prst="rect">
@@ -7042,21 +7686,21 @@
               </a:defRPr>
             </a:pPr>
             <a:r>
-              <a:t>Every component runs offline</a:t>
-            </a:r>
-          </a:p>
-        </p:txBody>
-      </p:sp>
-      <p:sp>
-        <p:nvSpPr>
-          <p:cNvPr id="5" name="TextBox 4"/>
-          <p:cNvSpPr txBox="1"/>
-          <p:nvPr/>
-        </p:nvSpPr>
-        <p:spPr>
-          <a:xfrm>
-            <a:off x="822960" y="1645920"/>
-            <a:ext cx="2286000" cy="365760"/>
+              <a:t>We know what we built — and what we did not</a:t>
+            </a:r>
+          </a:p>
+        </p:txBody>
+      </p:sp>
+      <p:sp>
+        <p:nvSpPr>
+          <p:cNvPr id="6" name="TextBox 5"/>
+          <p:cNvSpPr txBox="1"/>
+          <p:nvPr/>
+        </p:nvSpPr>
+        <p:spPr>
+          <a:xfrm>
+            <a:off x="822960" y="1691640"/>
+            <a:ext cx="5029200" cy="365760"/>
           </a:xfrm>
           <a:prstGeom prst="rect">
             <a:avLst/>
@@ -7072,61 +7716,109 @@
             <a:pPr algn="l">
               <a:defRPr sz="1600" b="1">
                 <a:solidFill>
-                  <a:srgbClr val="F59E0B"/>
-                </a:solidFill>
-              </a:defRPr>
-            </a:pPr>
-            <a:r>
-              <a:t>Transport</a:t>
-            </a:r>
-          </a:p>
-        </p:txBody>
-      </p:sp>
-      <p:sp>
-        <p:nvSpPr>
-          <p:cNvPr id="6" name="TextBox 5"/>
-          <p:cNvSpPr txBox="1"/>
-          <p:nvPr/>
-        </p:nvSpPr>
-        <p:spPr>
-          <a:xfrm>
-            <a:off x="3200400" y="1645920"/>
-            <a:ext cx="7772400" cy="365760"/>
-          </a:xfrm>
-          <a:prstGeom prst="rect">
-            <a:avLst/>
-          </a:prstGeom>
-          <a:noFill/>
-        </p:spPr>
-        <p:txBody>
-          <a:bodyPr wrap="square">
-            <a:spAutoFit/>
-          </a:bodyPr>
-          <a:lstStyle/>
-          <a:p>
-            <a:pPr algn="l">
-              <a:defRPr sz="1600" b="0">
+                  <a:srgbClr val="22C55E"/>
+                </a:solidFill>
+              </a:defRPr>
+            </a:pPr>
+            <a:r>
+              <a:t>Safety &amp; operational awareness</a:t>
+            </a:r>
+          </a:p>
+        </p:txBody>
+      </p:sp>
+      <p:sp>
+        <p:nvSpPr>
+          <p:cNvPr id="7" name="TextBox 6"/>
+          <p:cNvSpPr txBox="1"/>
+          <p:nvPr/>
+        </p:nvSpPr>
+        <p:spPr>
+          <a:xfrm>
+            <a:off x="822960" y="2103120"/>
+            <a:ext cx="5029200" cy="3200400"/>
+          </a:xfrm>
+          <a:prstGeom prst="rect">
+            <a:avLst/>
+          </a:prstGeom>
+          <a:noFill/>
+        </p:spPr>
+        <p:txBody>
+          <a:bodyPr wrap="square">
+            <a:spAutoFit/>
+          </a:bodyPr>
+          <a:lstStyle/>
+          <a:p>
+            <a:pPr>
+              <a:spcAft>
+                <a:spcPts val="800"/>
+              </a:spcAft>
+              <a:defRPr sz="1500">
                 <a:solidFill>
                   <a:srgbClr val="F8FAFC"/>
                 </a:solidFill>
               </a:defRPr>
             </a:pPr>
             <a:r>
-              <a:t>Mosquitto MQTT (mesh stand-in)</a:t>
-            </a:r>
-          </a:p>
-        </p:txBody>
-      </p:sp>
-      <p:sp>
-        <p:nvSpPr>
-          <p:cNvPr id="7" name="TextBox 6"/>
-          <p:cNvSpPr txBox="1"/>
-          <p:nvPr/>
-        </p:nvSpPr>
-        <p:spPr>
-          <a:xfrm>
-            <a:off x="822960" y="2148840"/>
-            <a:ext cx="2286000" cy="365760"/>
+              <a:t>Never enrich oxygen underground — only increase airflow</a:t>
+            </a:r>
+          </a:p>
+          <a:p>
+            <a:pPr>
+              <a:spcAft>
+                <a:spcPts val="800"/>
+              </a:spcAft>
+              <a:defRPr sz="1500">
+                <a:solidFill>
+                  <a:srgbClr val="F8FAFC"/>
+                </a:solidFill>
+              </a:defRPr>
+            </a:pPr>
+            <a:r>
+              <a:t>Demo thresholds (1.0% / 1.5%) are illustrative; real legal limits differ</a:t>
+            </a:r>
+          </a:p>
+          <a:p>
+            <a:pPr>
+              <a:spcAft>
+                <a:spcPts val="800"/>
+              </a:spcAft>
+              <a:defRPr sz="1500">
+                <a:solidFill>
+                  <a:srgbClr val="F8FAFC"/>
+                </a:solidFill>
+              </a:defRPr>
+            </a:pPr>
+            <a:r>
+              <a:t>Template answers, not a cloud LLM — auditable but not open-ended</a:t>
+            </a:r>
+          </a:p>
+          <a:p>
+            <a:pPr>
+              <a:spcAft>
+                <a:spcPts val="800"/>
+              </a:spcAft>
+              <a:defRPr sz="1500">
+                <a:solidFill>
+                  <a:srgbClr val="F8FAFC"/>
+                </a:solidFill>
+              </a:defRPr>
+            </a:pPr>
+            <a:r>
+              <a:t>No personal data collected — sensor readings only, local storage</a:t>
+            </a:r>
+          </a:p>
+        </p:txBody>
+      </p:sp>
+      <p:sp>
+        <p:nvSpPr>
+          <p:cNvPr id="8" name="TextBox 7"/>
+          <p:cNvSpPr txBox="1"/>
+          <p:nvPr/>
+        </p:nvSpPr>
+        <p:spPr>
+          <a:xfrm>
+            <a:off x="6400800" y="1691640"/>
+            <a:ext cx="5029200" cy="365760"/>
           </a:xfrm>
           <a:prstGeom prst="rect">
             <a:avLst/>
@@ -7147,322 +7839,90 @@
               </a:defRPr>
             </a:pPr>
             <a:r>
-              <a:t>Backend</a:t>
-            </a:r>
-          </a:p>
-        </p:txBody>
-      </p:sp>
-      <p:sp>
-        <p:nvSpPr>
-          <p:cNvPr id="8" name="TextBox 7"/>
-          <p:cNvSpPr txBox="1"/>
-          <p:nvPr/>
-        </p:nvSpPr>
-        <p:spPr>
-          <a:xfrm>
-            <a:off x="3200400" y="2148840"/>
-            <a:ext cx="7772400" cy="365760"/>
-          </a:xfrm>
-          <a:prstGeom prst="rect">
-            <a:avLst/>
-          </a:prstGeom>
-          <a:noFill/>
-        </p:spPr>
-        <p:txBody>
-          <a:bodyPr wrap="square">
-            <a:spAutoFit/>
-          </a:bodyPr>
-          <a:lstStyle/>
-          <a:p>
-            <a:pPr algn="l">
-              <a:defRPr sz="1600" b="0">
+              <a:t>Honest limitations</a:t>
+            </a:r>
+          </a:p>
+        </p:txBody>
+      </p:sp>
+      <p:sp>
+        <p:nvSpPr>
+          <p:cNvPr id="9" name="TextBox 8"/>
+          <p:cNvSpPr txBox="1"/>
+          <p:nvPr/>
+        </p:nvSpPr>
+        <p:spPr>
+          <a:xfrm>
+            <a:off x="6400800" y="2103120"/>
+            <a:ext cx="5029200" cy="3200400"/>
+          </a:xfrm>
+          <a:prstGeom prst="rect">
+            <a:avLst/>
+          </a:prstGeom>
+          <a:noFill/>
+        </p:spPr>
+        <p:txBody>
+          <a:bodyPr wrap="square">
+            <a:spAutoFit/>
+          </a:bodyPr>
+          <a:lstStyle/>
+          <a:p>
+            <a:pPr>
+              <a:spcAft>
+                <a:spcPts val="800"/>
+              </a:spcAft>
+              <a:defRPr sz="1500">
                 <a:solidFill>
                   <a:srgbClr val="F8FAFC"/>
                 </a:solidFill>
               </a:defRPr>
             </a:pPr>
             <a:r>
-              <a:t>Python · FastAPI · paho-mqtt</a:t>
-            </a:r>
-          </a:p>
-        </p:txBody>
-      </p:sp>
-      <p:sp>
-        <p:nvSpPr>
-          <p:cNvPr id="9" name="TextBox 8"/>
-          <p:cNvSpPr txBox="1"/>
-          <p:nvPr/>
-        </p:nvSpPr>
-        <p:spPr>
-          <a:xfrm>
-            <a:off x="822960" y="2651760"/>
-            <a:ext cx="2286000" cy="365760"/>
-          </a:xfrm>
-          <a:prstGeom prst="rect">
-            <a:avLst/>
-          </a:prstGeom>
-          <a:noFill/>
-        </p:spPr>
-        <p:txBody>
-          <a:bodyPr wrap="square">
-            <a:spAutoFit/>
-          </a:bodyPr>
-          <a:lstStyle/>
-          <a:p>
-            <a:pPr algn="l">
-              <a:defRPr sz="1600" b="1">
-                <a:solidFill>
-                  <a:srgbClr val="F59E0B"/>
-                </a:solidFill>
-              </a:defRPr>
-            </a:pPr>
-            <a:r>
-              <a:t>Intelligence</a:t>
-            </a:r>
-          </a:p>
-        </p:txBody>
-      </p:sp>
-      <p:sp>
-        <p:nvSpPr>
-          <p:cNvPr id="10" name="TextBox 9"/>
-          <p:cNvSpPr txBox="1"/>
-          <p:nvPr/>
-        </p:nvSpPr>
-        <p:spPr>
-          <a:xfrm>
-            <a:off x="3200400" y="2651760"/>
-            <a:ext cx="7772400" cy="365760"/>
-          </a:xfrm>
-          <a:prstGeom prst="rect">
-            <a:avLst/>
-          </a:prstGeom>
-          <a:noFill/>
-        </p:spPr>
-        <p:txBody>
-          <a:bodyPr wrap="square">
-            <a:spAutoFit/>
-          </a:bodyPr>
-          <a:lstStyle/>
-          <a:p>
-            <a:pPr algn="l">
-              <a:defRPr sz="1600" b="0">
+              <a:t>Today: simulated zones on one laptop — not real hardware mesh</a:t>
+            </a:r>
+          </a:p>
+          <a:p>
+            <a:pPr>
+              <a:spcAft>
+                <a:spcPts val="800"/>
+              </a:spcAft>
+              <a:defRPr sz="1500">
                 <a:solidFill>
                   <a:srgbClr val="F8FAFC"/>
                 </a:solidFill>
               </a:defRPr>
             </a:pPr>
             <a:r>
-              <a:t>Trend detector · template answers · optional Ollama</a:t>
-            </a:r>
-          </a:p>
-        </p:txBody>
-      </p:sp>
-      <p:sp>
-        <p:nvSpPr>
-          <p:cNvPr id="11" name="TextBox 10"/>
-          <p:cNvSpPr txBox="1"/>
-          <p:nvPr/>
-        </p:nvSpPr>
-        <p:spPr>
-          <a:xfrm>
-            <a:off x="822960" y="3154680"/>
-            <a:ext cx="2286000" cy="365760"/>
-          </a:xfrm>
-          <a:prstGeom prst="rect">
-            <a:avLst/>
-          </a:prstGeom>
-          <a:noFill/>
-        </p:spPr>
-        <p:txBody>
-          <a:bodyPr wrap="square">
-            <a:spAutoFit/>
-          </a:bodyPr>
-          <a:lstStyle/>
-          <a:p>
-            <a:pPr algn="l">
-              <a:defRPr sz="1600" b="1">
-                <a:solidFill>
-                  <a:srgbClr val="F59E0B"/>
-                </a:solidFill>
-              </a:defRPr>
-            </a:pPr>
-            <a:r>
-              <a:t>Regulatory</a:t>
-            </a:r>
-          </a:p>
-        </p:txBody>
-      </p:sp>
-      <p:sp>
-        <p:nvSpPr>
-          <p:cNvPr id="12" name="TextBox 11"/>
-          <p:cNvSpPr txBox="1"/>
-          <p:nvPr/>
-        </p:nvSpPr>
-        <p:spPr>
-          <a:xfrm>
-            <a:off x="3200400" y="3154680"/>
-            <a:ext cx="7772400" cy="365760"/>
-          </a:xfrm>
-          <a:prstGeom prst="rect">
-            <a:avLst/>
-          </a:prstGeom>
-          <a:noFill/>
-        </p:spPr>
-        <p:txBody>
-          <a:bodyPr wrap="square">
-            <a:spAutoFit/>
-          </a:bodyPr>
-          <a:lstStyle/>
-          <a:p>
-            <a:pPr algn="l">
-              <a:defRPr sz="1600" b="0">
+              <a:t>No real Bluetooth/radio mesh shipped in 3 hours</a:t>
+            </a:r>
+          </a:p>
+          <a:p>
+            <a:pPr>
+              <a:spcAft>
+                <a:spcPts val="800"/>
+              </a:spcAft>
+              <a:defRPr sz="1500">
                 <a:solidFill>
                   <a:srgbClr val="F8FAFC"/>
                 </a:solidFill>
               </a:defRPr>
             </a:pPr>
             <a:r>
-              <a:t>Local Reg 854 .txt retrieval</a:t>
-            </a:r>
-          </a:p>
-        </p:txBody>
-      </p:sp>
-      <p:sp>
-        <p:nvSpPr>
-          <p:cNvPr id="13" name="TextBox 12"/>
-          <p:cNvSpPr txBox="1"/>
-          <p:nvPr/>
-        </p:nvSpPr>
-        <p:spPr>
-          <a:xfrm>
-            <a:off x="822960" y="3657600"/>
-            <a:ext cx="2286000" cy="365760"/>
-          </a:xfrm>
-          <a:prstGeom prst="rect">
-            <a:avLst/>
-          </a:prstGeom>
-          <a:noFill/>
-        </p:spPr>
-        <p:txBody>
-          <a:bodyPr wrap="square">
-            <a:spAutoFit/>
-          </a:bodyPr>
-          <a:lstStyle/>
-          <a:p>
-            <a:pPr algn="l">
-              <a:defRPr sz="1600" b="1">
-                <a:solidFill>
-                  <a:srgbClr val="F59E0B"/>
-                </a:solidFill>
-              </a:defRPr>
-            </a:pPr>
-            <a:r>
-              <a:t>Frontend</a:t>
-            </a:r>
-          </a:p>
-        </p:txBody>
-      </p:sp>
-      <p:sp>
-        <p:nvSpPr>
-          <p:cNvPr id="14" name="TextBox 13"/>
-          <p:cNvSpPr txBox="1"/>
-          <p:nvPr/>
-        </p:nvSpPr>
-        <p:spPr>
-          <a:xfrm>
-            <a:off x="3200400" y="3657600"/>
-            <a:ext cx="7772400" cy="365760"/>
-          </a:xfrm>
-          <a:prstGeom prst="rect">
-            <a:avLst/>
-          </a:prstGeom>
-          <a:noFill/>
-        </p:spPr>
-        <p:txBody>
-          <a:bodyPr wrap="square">
-            <a:spAutoFit/>
-          </a:bodyPr>
-          <a:lstStyle/>
-          <a:p>
-            <a:pPr algn="l">
-              <a:defRPr sz="1600" b="0">
+              <a:t>Web Speech API varies by browser — on-screen text is fallback</a:t>
+            </a:r>
+          </a:p>
+          <a:p>
+            <a:pPr>
+              <a:spcAft>
+                <a:spcPts val="800"/>
+              </a:spcAft>
+              <a:defRPr sz="1500">
                 <a:solidFill>
                   <a:srgbClr val="F8FAFC"/>
                 </a:solidFill>
               </a:defRPr>
             </a:pPr>
             <a:r>
-              <a:t>Lovable → exported React (local dev server)</a:t>
-            </a:r>
-          </a:p>
-        </p:txBody>
-      </p:sp>
-      <p:sp>
-        <p:nvSpPr>
-          <p:cNvPr id="15" name="TextBox 14"/>
-          <p:cNvSpPr txBox="1"/>
-          <p:nvPr/>
-        </p:nvSpPr>
-        <p:spPr>
-          <a:xfrm>
-            <a:off x="822960" y="4160520"/>
-            <a:ext cx="2286000" cy="365760"/>
-          </a:xfrm>
-          <a:prstGeom prst="rect">
-            <a:avLst/>
-          </a:prstGeom>
-          <a:noFill/>
-        </p:spPr>
-        <p:txBody>
-          <a:bodyPr wrap="square">
-            <a:spAutoFit/>
-          </a:bodyPr>
-          <a:lstStyle/>
-          <a:p>
-            <a:pPr algn="l">
-              <a:defRPr sz="1600" b="1">
-                <a:solidFill>
-                  <a:srgbClr val="F59E0B"/>
-                </a:solidFill>
-              </a:defRPr>
-            </a:pPr>
-            <a:r>
-              <a:t>Voice</a:t>
-            </a:r>
-          </a:p>
-        </p:txBody>
-      </p:sp>
-      <p:sp>
-        <p:nvSpPr>
-          <p:cNvPr id="16" name="TextBox 15"/>
-          <p:cNvSpPr txBox="1"/>
-          <p:nvPr/>
-        </p:nvSpPr>
-        <p:spPr>
-          <a:xfrm>
-            <a:off x="3200400" y="4160520"/>
-            <a:ext cx="7772400" cy="365760"/>
-          </a:xfrm>
-          <a:prstGeom prst="rect">
-            <a:avLst/>
-          </a:prstGeom>
-          <a:noFill/>
-        </p:spPr>
-        <p:txBody>
-          <a:bodyPr wrap="square">
-            <a:spAutoFit/>
-          </a:bodyPr>
-          <a:lstStyle/>
-          <a:p>
-            <a:pPr algn="l">
-              <a:defRPr sz="1600" b="0">
-                <a:solidFill>
-                  <a:srgbClr val="F8FAFC"/>
-                </a:solidFill>
-              </a:defRPr>
-            </a:pPr>
-            <a:r>
-              <a:t>Browser Web Speech API (offline TTS)</a:t>
+              <a:t>Reg 854 retrieval is keyword-based, not full legal AI</a:t>
             </a:r>
           </a:p>
         </p:txBody>
